--- a/1 Year 12 Weekly/Week 13 (07 Dec) 2.1.4 Logic + 1.3.4 Web tech/1 Lesson 1.3.4.pptx
+++ b/1 Year 12 Weekly/Week 13 (07 Dec) 2.1.4 Logic + 1.3.4 Web tech/1 Lesson 1.3.4.pptx
@@ -18,6 +18,23 @@
     <p:sldId id="266" r:id="rId17"/>
     <p:sldId id="267" r:id="rId18"/>
     <p:sldId id="268" r:id="rId19"/>
+    <p:sldId id="269" r:id="rId20"/>
+    <p:sldId id="270" r:id="rId21"/>
+    <p:sldId id="271" r:id="rId22"/>
+    <p:sldId id="272" r:id="rId23"/>
+    <p:sldId id="273" r:id="rId24"/>
+    <p:sldId id="274" r:id="rId25"/>
+    <p:sldId id="275" r:id="rId26"/>
+    <p:sldId id="276" r:id="rId27"/>
+    <p:sldId id="277" r:id="rId28"/>
+    <p:sldId id="278" r:id="rId29"/>
+    <p:sldId id="279" r:id="rId30"/>
+    <p:sldId id="280" r:id="rId31"/>
+    <p:sldId id="281" r:id="rId32"/>
+    <p:sldId id="282" r:id="rId33"/>
+    <p:sldId id="283" r:id="rId34"/>
+    <p:sldId id="284" r:id="rId35"/>
+    <p:sldId id="285" r:id="rId36"/>
   </p:sldIdLst>
   <p:sldSz cx="12191695" cy="6858000" type="screen4x3"/>
   <p:notesSz cx="6858000" cy="9144000"/>
@@ -3137,7 +3154,7 @@
                 </a:solidFill>
                 <a:latin typeface="Calibri"/>
               </a:rPr>
-              <a:t>1.3.4 Web Technologies</a:t>
+              <a:t>1.3.4 Web Technologies (part 1)</a:t>
             </a:r>
           </a:p>
           <a:p>
@@ -3182,7 +3199,7 @@
                 </a:solidFill>
                 <a:latin typeface="Calibri"/>
               </a:rPr>
-              <a:t>Lesson deck — editable skeleton: adapt freely.</a:t>
+              <a:t>Week 13 (07 Dec)</a:t>
             </a:r>
           </a:p>
         </p:txBody>
@@ -3242,7 +3259,7 @@
                 </a:solidFill>
                 <a:latin typeface="Calibri"/>
               </a:rPr>
-              <a:t>Worked example</a:t>
+              <a:t>CSS: purpose and three places to put it</a:t>
             </a:r>
           </a:p>
         </p:txBody>
@@ -3271,29 +3288,17 @@
           <a:p>
             <a:pPr/>
             <a:r>
-              <a:rPr sz="2200" b="1">
-                <a:solidFill>
-                  <a:srgbClr val="2B6CB0"/>
-                </a:solidFill>
-                <a:latin typeface="Calibri"/>
-              </a:rPr>
-              <a:t>Deciding client-side vs server-side for a checkout form</a:t>
-            </a:r>
-          </a:p>
-          <a:p>
-            <a:pPr lvl="1"/>
-            <a:r>
               <a:rPr sz="2000" b="0">
                 <a:solidFill>
                   <a:srgbClr val="222222"/>
                 </a:solidFill>
                 <a:latin typeface="Calibri"/>
               </a:rPr>
-              <a:t>1. A checkout form checks the email address format and then verifies payment details.</a:t>
-            </a:r>
-          </a:p>
-          <a:p>
-            <a:pPr lvl="1"/>
+              <a:t>Inline: a style attribute on one tag — quick, but mixes style back into the structure.</a:t>
+            </a:r>
+          </a:p>
+          <a:p>
+            <a:pPr/>
             <a:r>
               <a:rPr sz="2000" b="0">
                 <a:solidFill>
@@ -3301,11 +3306,11 @@
                 </a:solidFill>
                 <a:latin typeface="Calibri"/>
               </a:rPr>
-              <a:t>2. The email format check is simple and not security-critical, so do it client-side for instant feedback.</a:t>
-            </a:r>
-          </a:p>
-          <a:p>
-            <a:pPr lvl="1"/>
+              <a:t>Internal: rules inside a style tag in the head — applies to that one page only.</a:t>
+            </a:r>
+          </a:p>
+          <a:p>
+            <a:pPr/>
             <a:r>
               <a:rPr sz="2000" b="0">
                 <a:solidFill>
@@ -3313,11 +3318,11 @@
                 </a:solidFill>
                 <a:latin typeface="Calibri"/>
               </a:rPr>
-              <a:t>3. Client-side validation also reduces server load because no round trip is needed for a simple check.</a:t>
-            </a:r>
-          </a:p>
-          <a:p>
-            <a:pPr lvl="1"/>
+              <a:t>External: a separate .css file attached with link — one file styles every page (best practice).</a:t>
+            </a:r>
+          </a:p>
+          <a:p>
+            <a:pPr/>
             <a:r>
               <a:rPr sz="2000" b="0">
                 <a:solidFill>
@@ -3325,31 +3330,79 @@
                 </a:solidFill>
                 <a:latin typeface="Calibri"/>
               </a:rPr>
-              <a:t>4. Payment verification is security-critical, so it must be server-side because client-side code can be viewed and bypassed.</a:t>
-            </a:r>
-          </a:p>
-          <a:p>
-            <a:pPr lvl="1"/>
-            <a:r>
-              <a:rPr sz="2000" b="0">
-                <a:solidFill>
-                  <a:srgbClr val="222222"/>
-                </a:solidFill>
-                <a:latin typeface="Calibri"/>
-              </a:rPr>
-              <a:t>5. The bank's records and logic must stay hidden on the server, so verification cannot be trusted to the browser.</a:t>
-            </a:r>
-          </a:p>
-          <a:p>
-            <a:pPr lvl="1"/>
-            <a:r>
-              <a:rPr sz="2000" b="0">
-                <a:solidFill>
-                  <a:srgbClr val="222222"/>
-                </a:solidFill>
-                <a:latin typeface="Calibri"/>
-              </a:rPr>
-              <a:t>6. Conclusion: server-side is more secure but slower and adds load — an acceptable trade-off for sensitive payment data.</a:t>
+              <a:t>Common properties: color, background-color, font-family, border, width, height, text-align.</a:t>
+            </a:r>
+          </a:p>
+          <a:p>
+            <a:pPr lvl="1"/>
+            <a:r>
+              <a:rPr sz="1600" b="0">
+                <a:solidFill>
+                  <a:srgbClr val="1A365D"/>
+                </a:solidFill>
+                <a:latin typeface="Consolas"/>
+              </a:rPr>
+              <a:t>&lt;p style="color: red;"&gt;Inline style on one tag&lt;/p&gt;</a:t>
+            </a:r>
+          </a:p>
+          <a:p>
+            <a:pPr lvl="1"/>
+            <a:r>
+              <a:rPr sz="1600" b="0">
+                <a:solidFill>
+                  <a:srgbClr val="1A365D"/>
+                </a:solidFill>
+                <a:latin typeface="Consolas"/>
+              </a:rPr>
+              <a:t>&lt;style&gt;</a:t>
+            </a:r>
+          </a:p>
+          <a:p>
+            <a:pPr lvl="1"/>
+            <a:r>
+              <a:rPr sz="1600" b="0">
+                <a:solidFill>
+                  <a:srgbClr val="1A365D"/>
+                </a:solidFill>
+                <a:latin typeface="Consolas"/>
+              </a:rPr>
+              <a:t>  p { font-family: Arial; }</a:t>
+            </a:r>
+          </a:p>
+          <a:p>
+            <a:pPr lvl="1"/>
+            <a:r>
+              <a:rPr sz="1600" b="0">
+                <a:solidFill>
+                  <a:srgbClr val="1A365D"/>
+                </a:solidFill>
+                <a:latin typeface="Consolas"/>
+              </a:rPr>
+              <a:t>&lt;/style&gt;</a:t>
+            </a:r>
+          </a:p>
+          <a:p>
+            <a:pPr lvl="1"/>
+            <a:r>
+              <a:rPr sz="1600" b="0">
+                <a:solidFill>
+                  <a:srgbClr val="1A365D"/>
+                </a:solidFill>
+                <a:latin typeface="Consolas"/>
+              </a:rPr>
+              <a:t>&lt;link rel="stylesheet" href="styles.css"&gt;</a:t>
+            </a:r>
+          </a:p>
+          <a:p>
+            <a:pPr/>
+            <a:r>
+              <a:rPr sz="1800" b="1">
+                <a:solidFill>
+                  <a:srgbClr val="B76E00"/>
+                </a:solidFill>
+                <a:latin typeface="Calibri"/>
+              </a:rPr>
+              <a:t>One edit to an external stylesheet restyles the whole site — the advantage examiners reward.</a:t>
             </a:r>
           </a:p>
         </p:txBody>
@@ -3409,7 +3462,7 @@
                 </a:solidFill>
                 <a:latin typeface="Calibri"/>
               </a:rPr>
-              <a:t>Your turn</a:t>
+              <a:t>CSS selectors: elements, classes and identifiers</a:t>
             </a:r>
           </a:p>
         </p:txBody>
@@ -3438,48 +3491,85 @@
           <a:p>
             <a:pPr/>
             <a:r>
-              <a:rPr sz="2400" b="1">
-                <a:solidFill>
-                  <a:srgbClr val="2B6CB0"/>
-                </a:solidFill>
-                <a:latin typeface="Calibri"/>
-              </a:rPr>
-              <a:t>Task</a:t>
-            </a:r>
-          </a:p>
-          <a:p>
-            <a:pPr lvl="1"/>
-            <a:r>
-              <a:rPr sz="2200" b="0">
-                <a:solidFill>
-                  <a:srgbClr val="222222"/>
-                </a:solidFill>
-                <a:latin typeface="Calibri"/>
-              </a:rPr>
-              <a:t>For each task, state whether it is best done client-side or server-side and give a one-line reason: (a) highlighting a menu item on hover, (b) checking a username and password against a database, (c) showing an instant 'passwords do not match' message, (d) calculating an order total that affects what the customer is charged.</a:t>
-            </a:r>
-          </a:p>
-          <a:p>
-            <a:r>
-              <a:rPr sz="2400" b="1">
-                <a:solidFill>
-                  <a:srgbClr val="B76E00"/>
-                </a:solidFill>
-                <a:latin typeface="Calibri"/>
-              </a:rPr>
-              <a:t>Challenge / stretch</a:t>
-            </a:r>
-          </a:p>
-          <a:p>
-            <a:pPr lvl="1"/>
-            <a:r>
-              <a:rPr sz="2200" b="0">
-                <a:solidFill>
-                  <a:srgbClr val="222222"/>
-                </a:solidFill>
-                <a:latin typeface="Calibri"/>
-              </a:rPr>
-              <a:t>Explain why a PageRank calculation needs both a damping factor and iteration. Describe what would go wrong with ranking if either were removed, using the ideas of a random surfer and convergence.</a:t>
+              <a:rPr sz="2000" b="0">
+                <a:solidFill>
+                  <a:srgbClr val="222222"/>
+                </a:solidFill>
+                <a:latin typeface="Calibri"/>
+              </a:rPr>
+              <a:t>An element selector (h1) styles every matching tag on the page.</a:t>
+            </a:r>
+          </a:p>
+          <a:p>
+            <a:pPr/>
+            <a:r>
+              <a:rPr sz="2000" b="0">
+                <a:solidFill>
+                  <a:srgbClr val="222222"/>
+                </a:solidFill>
+                <a:latin typeface="Calibri"/>
+              </a:rPr>
+              <a:t>A class selector (.warning) styles every element carrying class="warning" — reusable on many elements.</a:t>
+            </a:r>
+          </a:p>
+          <a:p>
+            <a:pPr/>
+            <a:r>
+              <a:rPr sz="2000" b="0">
+                <a:solidFill>
+                  <a:srgbClr val="222222"/>
+                </a:solidFill>
+                <a:latin typeface="Calibri"/>
+              </a:rPr>
+              <a:t>An id selector (#menu) styles the single element with id="menu" — each id is unique per page.</a:t>
+            </a:r>
+          </a:p>
+          <a:p>
+            <a:pPr/>
+            <a:r>
+              <a:rPr sz="2000" b="0">
+                <a:solidFill>
+                  <a:srgbClr val="222222"/>
+                </a:solidFill>
+                <a:latin typeface="Calibri"/>
+              </a:rPr>
+              <a:t>In the HTML, the class= and id= attributes are what connect elements to the rules.</a:t>
+            </a:r>
+          </a:p>
+          <a:p>
+            <a:pPr lvl="1"/>
+            <a:r>
+              <a:rPr sz="1600" b="0">
+                <a:solidFill>
+                  <a:srgbClr val="1A365D"/>
+                </a:solidFill>
+                <a:latin typeface="Consolas"/>
+              </a:rPr>
+              <a:t>h1 { color: navy; text-align: center; }</a:t>
+            </a:r>
+          </a:p>
+          <a:p>
+            <a:pPr lvl="1"/>
+            <a:r>
+              <a:rPr sz="1600" b="0">
+                <a:solidFill>
+                  <a:srgbClr val="1A365D"/>
+                </a:solidFill>
+                <a:latin typeface="Consolas"/>
+              </a:rPr>
+              <a:t>.warning { color: red; font-family: Arial; }</a:t>
+            </a:r>
+          </a:p>
+          <a:p>
+            <a:pPr lvl="1"/>
+            <a:r>
+              <a:rPr sz="1600" b="0">
+                <a:solidFill>
+                  <a:srgbClr val="1A365D"/>
+                </a:solidFill>
+                <a:latin typeface="Consolas"/>
+              </a:rPr>
+              <a:t>#menu { width: 200px; height: 400px; background-color: grey; border: 1px solid black; }</a:t>
             </a:r>
           </a:p>
         </p:txBody>
@@ -3539,7 +3629,7 @@
                 </a:solidFill>
                 <a:latin typeface="Calibri"/>
               </a:rPr>
-              <a:t>Exit ticket</a:t>
+              <a:t>JavaScript basics: variables, functions, events</a:t>
             </a:r>
           </a:p>
         </p:txBody>
@@ -3566,36 +3656,147 @@
           </a:bodyPr>
           <a:lstStyle/>
           <a:p>
-            <a:r>
-              <a:rPr sz="2200" b="1">
-                <a:solidFill>
-                  <a:srgbClr val="222222"/>
-                </a:solidFill>
-                <a:latin typeface="Calibri"/>
-              </a:rPr>
-              <a:t>1. What does it mean that PageRank is calculated iteratively, and when does it stop?</a:t>
-            </a:r>
-          </a:p>
-          <a:p>
-            <a:r>
-              <a:rPr sz="2200" b="1">
-                <a:solidFill>
-                  <a:srgbClr val="222222"/>
-                </a:solidFill>
-                <a:latin typeface="Calibri"/>
-              </a:rPr>
-              <a:t>2. Give one advantage and one disadvantage of client-side over server-side processing.</a:t>
-            </a:r>
-          </a:p>
-          <a:p>
-            <a:r>
-              <a:rPr sz="2200" b="1">
-                <a:solidFill>
-                  <a:srgbClr val="222222"/>
-                </a:solidFill>
-                <a:latin typeface="Calibri"/>
-              </a:rPr>
-              <a:t>3. What does a '#' CSS selector target, and what do '.' and a bare name target?</a:t>
+            <a:pPr/>
+            <a:r>
+              <a:rPr sz="2000" b="0">
+                <a:solidFill>
+                  <a:srgbClr val="222222"/>
+                </a:solidFill>
+                <a:latin typeface="Calibri"/>
+              </a:rPr>
+              <a:t>Variables (var or let) store values; functions package reusable code, much like pseudocode.</a:t>
+            </a:r>
+          </a:p>
+          <a:p>
+            <a:pPr/>
+            <a:r>
+              <a:rPr sz="2000" b="0">
+                <a:solidFill>
+                  <a:srgbClr val="222222"/>
+                </a:solidFill>
+                <a:latin typeface="Calibri"/>
+              </a:rPr>
+              <a:t>Events such as onclick run a function when the user acts on the page.</a:t>
+            </a:r>
+          </a:p>
+          <a:p>
+            <a:pPr/>
+            <a:r>
+              <a:rPr sz="2000" b="0">
+                <a:solidFill>
+                  <a:srgbClr val="222222"/>
+                </a:solidFill>
+                <a:latin typeface="Calibri"/>
+              </a:rPr>
+              <a:t>document.getElementById("x") fetches an element; .value reads an input box; .innerHTML changes displayed content.</a:t>
+            </a:r>
+          </a:p>
+          <a:p>
+            <a:pPr/>
+            <a:r>
+              <a:rPr sz="2000" b="0">
+                <a:solidFill>
+                  <a:srgbClr val="222222"/>
+                </a:solidFill>
+                <a:latin typeface="Calibri"/>
+              </a:rPr>
+              <a:t>Styles can be changed too, e.g. element.style.color = "red".</a:t>
+            </a:r>
+          </a:p>
+          <a:p>
+            <a:pPr lvl="1"/>
+            <a:r>
+              <a:rPr sz="1600" b="0">
+                <a:solidFill>
+                  <a:srgbClr val="1A365D"/>
+                </a:solidFill>
+                <a:latin typeface="Consolas"/>
+              </a:rPr>
+              <a:t>&lt;button onclick="update()"&gt;Click me&lt;/button&gt;</a:t>
+            </a:r>
+          </a:p>
+          <a:p>
+            <a:pPr lvl="1"/>
+            <a:r>
+              <a:rPr sz="1600" b="0">
+                <a:solidFill>
+                  <a:srgbClr val="1A365D"/>
+                </a:solidFill>
+                <a:latin typeface="Consolas"/>
+              </a:rPr>
+              <a:t>&lt;p id="output"&gt;Waiting...&lt;/p&gt;</a:t>
+            </a:r>
+          </a:p>
+          <a:p>
+            <a:pPr lvl="1"/>
+            <a:r>
+              <a:rPr sz="1600" b="0">
+                <a:solidFill>
+                  <a:srgbClr val="1A365D"/>
+                </a:solidFill>
+                <a:latin typeface="Consolas"/>
+              </a:rPr>
+              <a:t>&lt;script&gt;</a:t>
+            </a:r>
+          </a:p>
+          <a:p>
+            <a:pPr lvl="1"/>
+            <a:r>
+              <a:rPr sz="1600" b="0">
+                <a:solidFill>
+                  <a:srgbClr val="1A365D"/>
+                </a:solidFill>
+                <a:latin typeface="Consolas"/>
+              </a:rPr>
+              <a:t>  function update() {</a:t>
+            </a:r>
+          </a:p>
+          <a:p>
+            <a:pPr lvl="1"/>
+            <a:r>
+              <a:rPr sz="1600" b="0">
+                <a:solidFill>
+                  <a:srgbClr val="1A365D"/>
+                </a:solidFill>
+                <a:latin typeface="Consolas"/>
+              </a:rPr>
+              <a:t>    var msg = "Button clicked!";</a:t>
+            </a:r>
+          </a:p>
+          <a:p>
+            <a:pPr lvl="1"/>
+            <a:r>
+              <a:rPr sz="1600" b="0">
+                <a:solidFill>
+                  <a:srgbClr val="1A365D"/>
+                </a:solidFill>
+                <a:latin typeface="Consolas"/>
+              </a:rPr>
+              <a:t>    document.getElementById("output").innerHTML = msg;</a:t>
+            </a:r>
+          </a:p>
+          <a:p>
+            <a:pPr lvl="1"/>
+            <a:r>
+              <a:rPr sz="1600" b="0">
+                <a:solidFill>
+                  <a:srgbClr val="1A365D"/>
+                </a:solidFill>
+                <a:latin typeface="Consolas"/>
+              </a:rPr>
+              <a:t>  }</a:t>
+            </a:r>
+          </a:p>
+          <a:p>
+            <a:pPr lvl="1"/>
+            <a:r>
+              <a:rPr sz="1600" b="0">
+                <a:solidFill>
+                  <a:srgbClr val="1A365D"/>
+                </a:solidFill>
+                <a:latin typeface="Consolas"/>
+              </a:rPr>
+              <a:t>&lt;/script&gt;</a:t>
             </a:r>
           </a:p>
         </p:txBody>
@@ -3655,7 +3856,7 @@
                 </a:solidFill>
                 <a:latin typeface="Calibri"/>
               </a:rPr>
-              <a:t>Exit ticket — answers</a:t>
+              <a:t>JavaScript form validation</a:t>
             </a:r>
           </a:p>
         </p:txBody>
@@ -3682,72 +3883,1077 @@
           </a:bodyPr>
           <a:lstStyle/>
           <a:p>
+            <a:pPr/>
+            <a:r>
+              <a:rPr sz="2000" b="0">
+                <a:solidFill>
+                  <a:srgbClr val="222222"/>
+                </a:solidFill>
+                <a:latin typeface="Calibri"/>
+              </a:rPr>
+              <a:t>Validation checks input is present and sensible before the form is submitted to the server.</a:t>
+            </a:r>
+          </a:p>
+          <a:p>
+            <a:pPr/>
+            <a:r>
+              <a:rPr sz="2000" b="0">
+                <a:solidFill>
+                  <a:srgbClr val="222222"/>
+                </a:solidFill>
+                <a:latin typeface="Calibri"/>
+              </a:rPr>
+              <a:t>Read the box with getElementById and .value, test it with if, and alert the user on failure.</a:t>
+            </a:r>
+          </a:p>
+          <a:p>
+            <a:pPr/>
+            <a:r>
+              <a:rPr sz="2000" b="0">
+                <a:solidFill>
+                  <a:srgbClr val="222222"/>
+                </a:solidFill>
+                <a:latin typeface="Calibri"/>
+              </a:rPr>
+              <a:t>Returning false stops the submission; returning true lets the form send.</a:t>
+            </a:r>
+          </a:p>
+          <a:p>
+            <a:pPr lvl="1"/>
+            <a:r>
+              <a:rPr sz="1600" b="0">
+                <a:solidFill>
+                  <a:srgbClr val="1A365D"/>
+                </a:solidFill>
+                <a:latin typeface="Consolas"/>
+              </a:rPr>
+              <a:t>function checkEmail() {</a:t>
+            </a:r>
+          </a:p>
+          <a:p>
+            <a:pPr lvl="1"/>
+            <a:r>
+              <a:rPr sz="1600" b="0">
+                <a:solidFill>
+                  <a:srgbClr val="1A365D"/>
+                </a:solidFill>
+                <a:latin typeface="Consolas"/>
+              </a:rPr>
+              <a:t>  var email = document.getElementById("email").value;</a:t>
+            </a:r>
+          </a:p>
+          <a:p>
+            <a:pPr lvl="1"/>
+            <a:r>
+              <a:rPr sz="1600" b="0">
+                <a:solidFill>
+                  <a:srgbClr val="1A365D"/>
+                </a:solidFill>
+                <a:latin typeface="Consolas"/>
+              </a:rPr>
+              <a:t>  if (email == "") {</a:t>
+            </a:r>
+          </a:p>
+          <a:p>
+            <a:pPr lvl="1"/>
+            <a:r>
+              <a:rPr sz="1600" b="0">
+                <a:solidFill>
+                  <a:srgbClr val="1A365D"/>
+                </a:solidFill>
+                <a:latin typeface="Consolas"/>
+              </a:rPr>
+              <a:t>    alert("Email is required");</a:t>
+            </a:r>
+          </a:p>
+          <a:p>
+            <a:pPr lvl="1"/>
+            <a:r>
+              <a:rPr sz="1600" b="0">
+                <a:solidFill>
+                  <a:srgbClr val="1A365D"/>
+                </a:solidFill>
+                <a:latin typeface="Consolas"/>
+              </a:rPr>
+              <a:t>    return false;</a:t>
+            </a:r>
+          </a:p>
+          <a:p>
+            <a:pPr lvl="1"/>
+            <a:r>
+              <a:rPr sz="1600" b="0">
+                <a:solidFill>
+                  <a:srgbClr val="1A365D"/>
+                </a:solidFill>
+                <a:latin typeface="Consolas"/>
+              </a:rPr>
+              <a:t>  }</a:t>
+            </a:r>
+          </a:p>
+          <a:p>
+            <a:pPr lvl="1"/>
+            <a:r>
+              <a:rPr sz="1600" b="0">
+                <a:solidFill>
+                  <a:srgbClr val="1A365D"/>
+                </a:solidFill>
+                <a:latin typeface="Consolas"/>
+              </a:rPr>
+              <a:t>  return true;</a:t>
+            </a:r>
+          </a:p>
+          <a:p>
+            <a:pPr lvl="1"/>
+            <a:r>
+              <a:rPr sz="1600" b="0">
+                <a:solidFill>
+                  <a:srgbClr val="1A365D"/>
+                </a:solidFill>
+                <a:latin typeface="Consolas"/>
+              </a:rPr>
+              <a:t>}</a:t>
+            </a:r>
+          </a:p>
+          <a:p>
+            <a:pPr/>
+            <a:r>
+              <a:rPr sz="1800" b="1">
+                <a:solidFill>
+                  <a:srgbClr val="B76E00"/>
+                </a:solidFill>
+                <a:latin typeface="Calibri"/>
+              </a:rPr>
+              <a:t>Client-side validation improves user experience but can be viewed and bypassed — never rely on it alone.</a:t>
+            </a:r>
+          </a:p>
+        </p:txBody>
+      </p:sp>
+    </p:spTree>
+  </p:cSld>
+  <p:clrMapOvr>
+    <a:masterClrMapping/>
+  </p:clrMapOvr>
+</p:sld>
+</file>
+
+<file path=ppt/slides/slide14.xml><?xml version="1.0" encoding="utf-8"?>
+<p:sld xmlns:a="http://schemas.openxmlformats.org/drawingml/2006/main" xmlns:p="http://schemas.openxmlformats.org/presentationml/2006/main" xmlns:r="http://schemas.openxmlformats.org/officeDocument/2006/relationships">
+  <p:cSld>
+    <p:bg>
+      <p:bgPr>
+        <a:solidFill>
+          <a:srgbClr val="FFFFFF"/>
+        </a:solidFill>
+        <a:effectLst/>
+      </p:bgPr>
+    </p:bg>
+    <p:spTree>
+      <p:nvGrpSpPr>
+        <p:cNvPr id="1" name=""/>
+        <p:cNvGrpSpPr/>
+        <p:nvPr/>
+      </p:nvGrpSpPr>
+      <p:grpSpPr/>
+      <p:sp>
+        <p:nvSpPr>
+          <p:cNvPr id="2" name="TextBox 1"/>
+          <p:cNvSpPr txBox="1"/>
+          <p:nvPr/>
+        </p:nvSpPr>
+        <p:spPr>
+          <a:xfrm>
+            <a:off x="548640" y="274320"/>
+            <a:ext cx="11064240" cy="822960"/>
+          </a:xfrm>
+          <a:prstGeom prst="rect">
+            <a:avLst/>
+          </a:prstGeom>
+          <a:noFill/>
+        </p:spPr>
+        <p:txBody>
+          <a:bodyPr wrap="square">
+            <a:spAutoFit/>
+          </a:bodyPr>
+          <a:lstStyle/>
+          <a:p>
+            <a:r>
+              <a:rPr sz="3000" b="1" i="0">
+                <a:solidFill>
+                  <a:srgbClr val="2B6CB0"/>
+                </a:solidFill>
+                <a:latin typeface="Calibri"/>
+              </a:rPr>
+              <a:t>Client-side processing</a:t>
+            </a:r>
+          </a:p>
+        </p:txBody>
+      </p:sp>
+      <p:sp>
+        <p:nvSpPr>
+          <p:cNvPr id="3" name="TextBox 2"/>
+          <p:cNvSpPr txBox="1"/>
+          <p:nvPr/>
+        </p:nvSpPr>
+        <p:spPr>
+          <a:xfrm>
+            <a:off x="640080" y="1280160"/>
+            <a:ext cx="10881360" cy="5120640"/>
+          </a:xfrm>
+          <a:prstGeom prst="rect">
+            <a:avLst/>
+          </a:prstGeom>
+          <a:noFill/>
+        </p:spPr>
+        <p:txBody>
+          <a:bodyPr wrap="square">
+            <a:spAutoFit/>
+          </a:bodyPr>
+          <a:lstStyle/>
+          <a:p>
+            <a:pPr/>
+            <a:r>
+              <a:rPr sz="2000" b="0">
+                <a:solidFill>
+                  <a:srgbClr val="222222"/>
+                </a:solidFill>
+                <a:latin typeface="Calibri"/>
+              </a:rPr>
+              <a:t>Runs in the user's browser: form validation, instant feedback, animation, updating content without reloading.</a:t>
+            </a:r>
+          </a:p>
+          <a:p>
+            <a:pPr/>
+            <a:r>
+              <a:rPr sz="2000" b="0">
+                <a:solidFill>
+                  <a:srgbClr val="222222"/>
+                </a:solidFill>
+                <a:latin typeface="Calibri"/>
+              </a:rPr>
+              <a:t>Advantages: fast and immediate (no round trip to the server); reduces server load and bandwidth.</a:t>
+            </a:r>
+          </a:p>
+          <a:p>
+            <a:pPr/>
+            <a:r>
+              <a:rPr sz="2000" b="0">
+                <a:solidFill>
+                  <a:srgbClr val="222222"/>
+                </a:solidFill>
+                <a:latin typeface="Calibri"/>
+              </a:rPr>
+              <a:t>Disadvantages: the code can be viewed, modified or disabled by the user, so it is insecure.</a:t>
+            </a:r>
+          </a:p>
+          <a:p>
+            <a:pPr/>
+            <a:r>
+              <a:rPr sz="2000" b="0">
+                <a:solidFill>
+                  <a:srgbClr val="222222"/>
+                </a:solidFill>
+                <a:latin typeface="Calibri"/>
+              </a:rPr>
+              <a:t>It also depends on the user's browser and device behaving as expected.</a:t>
+            </a:r>
+          </a:p>
+        </p:txBody>
+      </p:sp>
+    </p:spTree>
+  </p:cSld>
+  <p:clrMapOvr>
+    <a:masterClrMapping/>
+  </p:clrMapOvr>
+</p:sld>
+</file>
+
+<file path=ppt/slides/slide15.xml><?xml version="1.0" encoding="utf-8"?>
+<p:sld xmlns:a="http://schemas.openxmlformats.org/drawingml/2006/main" xmlns:p="http://schemas.openxmlformats.org/presentationml/2006/main" xmlns:r="http://schemas.openxmlformats.org/officeDocument/2006/relationships">
+  <p:cSld>
+    <p:bg>
+      <p:bgPr>
+        <a:solidFill>
+          <a:srgbClr val="FFFFFF"/>
+        </a:solidFill>
+        <a:effectLst/>
+      </p:bgPr>
+    </p:bg>
+    <p:spTree>
+      <p:nvGrpSpPr>
+        <p:cNvPr id="1" name=""/>
+        <p:cNvGrpSpPr/>
+        <p:nvPr/>
+      </p:nvGrpSpPr>
+      <p:grpSpPr/>
+      <p:sp>
+        <p:nvSpPr>
+          <p:cNvPr id="2" name="TextBox 1"/>
+          <p:cNvSpPr txBox="1"/>
+          <p:nvPr/>
+        </p:nvSpPr>
+        <p:spPr>
+          <a:xfrm>
+            <a:off x="548640" y="274320"/>
+            <a:ext cx="11064240" cy="822960"/>
+          </a:xfrm>
+          <a:prstGeom prst="rect">
+            <a:avLst/>
+          </a:prstGeom>
+          <a:noFill/>
+        </p:spPr>
+        <p:txBody>
+          <a:bodyPr wrap="square">
+            <a:spAutoFit/>
+          </a:bodyPr>
+          <a:lstStyle/>
+          <a:p>
+            <a:r>
+              <a:rPr sz="3000" b="1" i="0">
+                <a:solidFill>
+                  <a:srgbClr val="2B6CB0"/>
+                </a:solidFill>
+                <a:latin typeface="Calibri"/>
+              </a:rPr>
+              <a:t>Server-side processing: when it must be used</a:t>
+            </a:r>
+          </a:p>
+        </p:txBody>
+      </p:sp>
+      <p:sp>
+        <p:nvSpPr>
+          <p:cNvPr id="3" name="TextBox 2"/>
+          <p:cNvSpPr txBox="1"/>
+          <p:nvPr/>
+        </p:nvSpPr>
+        <p:spPr>
+          <a:xfrm>
+            <a:off x="640080" y="1280160"/>
+            <a:ext cx="10881360" cy="5120640"/>
+          </a:xfrm>
+          <a:prstGeom prst="rect">
+            <a:avLst/>
+          </a:prstGeom>
+          <a:noFill/>
+        </p:spPr>
+        <p:txBody>
+          <a:bodyPr wrap="square">
+            <a:spAutoFit/>
+          </a:bodyPr>
+          <a:lstStyle/>
+          <a:p>
+            <a:pPr/>
+            <a:r>
+              <a:rPr sz="2000" b="0">
+                <a:solidFill>
+                  <a:srgbClr val="222222"/>
+                </a:solidFill>
+                <a:latin typeface="Calibri"/>
+              </a:rPr>
+              <a:t>Runs on the web server (e.g. PHP with SQL): login checks, payments, searching a product database.</a:t>
+            </a:r>
+          </a:p>
+          <a:p>
+            <a:pPr/>
+            <a:r>
+              <a:rPr sz="2000" b="0">
+                <a:solidFill>
+                  <a:srgbClr val="222222"/>
+                </a:solidFill>
+                <a:latin typeface="Calibri"/>
+              </a:rPr>
+              <a:t>Must be used when logic or data has to stay secure, or when the data lives in a server database.</a:t>
+            </a:r>
+          </a:p>
+          <a:p>
+            <a:pPr/>
+            <a:r>
+              <a:rPr sz="2000" b="0">
+                <a:solidFill>
+                  <a:srgbClr val="222222"/>
+                </a:solidFill>
+                <a:latin typeface="Calibri"/>
+              </a:rPr>
+              <a:t>Client-side: fast, low server load, insecure. Server-side: secure, hidden, database access, but slower and loads the server.</a:t>
+            </a:r>
+          </a:p>
+          <a:p>
+            <a:pPr/>
+            <a:r>
+              <a:rPr sz="2000" b="0">
+                <a:solidFill>
+                  <a:srgbClr val="222222"/>
+                </a:solidFill>
+                <a:latin typeface="Calibri"/>
+              </a:rPr>
+              <a:t>Best practice: validate client-side for speed and repeat the checks server-side for security.</a:t>
+            </a:r>
+          </a:p>
+        </p:txBody>
+      </p:sp>
+    </p:spTree>
+  </p:cSld>
+  <p:clrMapOvr>
+    <a:masterClrMapping/>
+  </p:clrMapOvr>
+</p:sld>
+</file>
+
+<file path=ppt/slides/slide16.xml><?xml version="1.0" encoding="utf-8"?>
+<p:sld xmlns:a="http://schemas.openxmlformats.org/drawingml/2006/main" xmlns:p="http://schemas.openxmlformats.org/presentationml/2006/main" xmlns:r="http://schemas.openxmlformats.org/officeDocument/2006/relationships">
+  <p:cSld>
+    <p:bg>
+      <p:bgPr>
+        <a:solidFill>
+          <a:srgbClr val="FFFFFF"/>
+        </a:solidFill>
+        <a:effectLst/>
+      </p:bgPr>
+    </p:bg>
+    <p:spTree>
+      <p:nvGrpSpPr>
+        <p:cNvPr id="1" name=""/>
+        <p:cNvGrpSpPr/>
+        <p:nvPr/>
+      </p:nvGrpSpPr>
+      <p:grpSpPr/>
+      <p:sp>
+        <p:nvSpPr>
+          <p:cNvPr id="2" name="TextBox 1"/>
+          <p:cNvSpPr txBox="1"/>
+          <p:nvPr/>
+        </p:nvSpPr>
+        <p:spPr>
+          <a:xfrm>
+            <a:off x="548640" y="274320"/>
+            <a:ext cx="11064240" cy="822960"/>
+          </a:xfrm>
+          <a:prstGeom prst="rect">
+            <a:avLst/>
+          </a:prstGeom>
+          <a:noFill/>
+        </p:spPr>
+        <p:txBody>
+          <a:bodyPr wrap="square">
+            <a:spAutoFit/>
+          </a:bodyPr>
+          <a:lstStyle/>
+          <a:p>
+            <a:r>
+              <a:rPr sz="3000" b="1" i="0">
+                <a:solidFill>
+                  <a:srgbClr val="2B6CB0"/>
+                </a:solidFill>
+                <a:latin typeface="Calibri"/>
+              </a:rPr>
+              <a:t>Worked example 1</a:t>
+            </a:r>
+          </a:p>
+        </p:txBody>
+      </p:sp>
+      <p:sp>
+        <p:nvSpPr>
+          <p:cNvPr id="3" name="TextBox 2"/>
+          <p:cNvSpPr txBox="1"/>
+          <p:nvPr/>
+        </p:nvSpPr>
+        <p:spPr>
+          <a:xfrm>
+            <a:off x="640080" y="1280160"/>
+            <a:ext cx="10881360" cy="5120640"/>
+          </a:xfrm>
+          <a:prstGeom prst="rect">
+            <a:avLst/>
+          </a:prstGeom>
+          <a:noFill/>
+        </p:spPr>
+        <p:txBody>
+          <a:bodyPr wrap="square">
+            <a:spAutoFit/>
+          </a:bodyPr>
+          <a:lstStyle/>
+          <a:p>
+            <a:pPr/>
             <a:r>
               <a:rPr sz="2200" b="1">
                 <a:solidFill>
-                  <a:srgbClr val="222222"/>
-                </a:solidFill>
-                <a:latin typeface="Calibri"/>
-              </a:rPr>
-              <a:t>1. What does it mean that PageRank is calculated iteratively, and when does it stop?</a:t>
-            </a:r>
-          </a:p>
-          <a:p>
-            <a:pPr lvl="1"/>
-            <a:r>
-              <a:rPr sz="1800" i="1">
+                  <a:srgbClr val="2B6CB0"/>
+                </a:solidFill>
+                <a:latin typeface="Calibri"/>
+              </a:rPr>
+              <a:t>Building a small page: which selector styles what?</a:t>
+            </a:r>
+          </a:p>
+          <a:p>
+            <a:pPr lvl="1"/>
+            <a:r>
+              <a:rPr sz="1900" b="0">
+                <a:solidFill>
+                  <a:srgbClr val="222222"/>
+                </a:solidFill>
+                <a:latin typeface="Calibri"/>
+              </a:rPr>
+              <a:t>1. The HTML: &lt;html&gt; &lt;head&gt; &lt;title&gt;Clubs&lt;/title&gt; &lt;link rel="stylesheet" href="styles.css"&gt; &lt;/head&gt; &lt;body&gt; &lt;h1 id="pageTitle"&gt;Code Club&lt;/h1&gt; &lt;p class="highlight"&gt;Meets Tuesday lunchtime.&lt;/p&gt; &lt;p&gt;Open to all years.&lt;/p&gt; &lt;p class="highlight"&gt;Bring a laptop.&lt;/p&gt; &lt;/body&gt; &lt;/html&gt;</a:t>
+            </a:r>
+          </a:p>
+          <a:p>
+            <a:pPr lvl="1"/>
+            <a:r>
+              <a:rPr sz="1900" b="0">
+                <a:solidFill>
+                  <a:srgbClr val="222222"/>
+                </a:solidFill>
+                <a:latin typeface="Calibri"/>
+              </a:rPr>
+              <a:t>2. The external stylesheet styles.css: h1 { color: navy; text-align: center; }  .highlight { background-color: yellow; }  #pageTitle { border: 2px solid black; }</a:t>
+            </a:r>
+          </a:p>
+          <a:p>
+            <a:pPr lvl="1"/>
+            <a:r>
+              <a:rPr sz="1900" b="0">
+                <a:solidFill>
+                  <a:srgbClr val="222222"/>
+                </a:solidFill>
+                <a:latin typeface="Calibri"/>
+              </a:rPr>
+              <a:t>3. Rule 1 is an element selector: it styles every h1 — here just one — navy and centred.</a:t>
+            </a:r>
+          </a:p>
+          <a:p>
+            <a:pPr lvl="1"/>
+            <a:r>
+              <a:rPr sz="1900" b="0">
+                <a:solidFill>
+                  <a:srgbClr val="222222"/>
+                </a:solidFill>
+                <a:latin typeface="Calibri"/>
+              </a:rPr>
+              <a:t>4. Rule 2 is a class selector: it highlights the first and third paragraphs, because both carry class="highlight". A class is reusable on many elements.</a:t>
+            </a:r>
+          </a:p>
+          <a:p>
+            <a:pPr lvl="1"/>
+            <a:r>
+              <a:rPr sz="1900" b="0">
+                <a:solidFill>
+                  <a:srgbClr val="222222"/>
+                </a:solidFill>
+                <a:latin typeface="Calibri"/>
+              </a:rPr>
+              <a:t>5. Rule 3 is an id selector: it puts a border on the single element with id="pageTitle" — the h1. An id must be unique on the page.</a:t>
+            </a:r>
+          </a:p>
+          <a:p>
+            <a:pPr lvl="1"/>
+            <a:r>
+              <a:rPr sz="1900" b="0">
+                <a:solidFill>
+                  <a:srgbClr val="222222"/>
+                </a:solidFill>
+                <a:latin typeface="Calibri"/>
+              </a:rPr>
+              <a:t>6. So the h1 receives two rules (element and id) and the middle paragraph receives none — it has no class or id and no p rule exists.</a:t>
+            </a:r>
+          </a:p>
+          <a:p>
+            <a:pPr lvl="1"/>
+            <a:r>
+              <a:rPr sz="1900" b="0">
+                <a:solidFill>
+                  <a:srgbClr val="222222"/>
+                </a:solidFill>
+                <a:latin typeface="Calibri"/>
+              </a:rPr>
+              <a:t>7. Because the stylesheet is external, adding the same link tag to another page restyles it identically with no extra CSS.</a:t>
+            </a:r>
+          </a:p>
+        </p:txBody>
+      </p:sp>
+    </p:spTree>
+  </p:cSld>
+  <p:clrMapOvr>
+    <a:masterClrMapping/>
+  </p:clrMapOvr>
+</p:sld>
+</file>
+
+<file path=ppt/slides/slide17.xml><?xml version="1.0" encoding="utf-8"?>
+<p:sld xmlns:a="http://schemas.openxmlformats.org/drawingml/2006/main" xmlns:p="http://schemas.openxmlformats.org/presentationml/2006/main" xmlns:r="http://schemas.openxmlformats.org/officeDocument/2006/relationships">
+  <p:cSld>
+    <p:bg>
+      <p:bgPr>
+        <a:solidFill>
+          <a:srgbClr val="FFFFFF"/>
+        </a:solidFill>
+        <a:effectLst/>
+      </p:bgPr>
+    </p:bg>
+    <p:spTree>
+      <p:nvGrpSpPr>
+        <p:cNvPr id="1" name=""/>
+        <p:cNvGrpSpPr/>
+        <p:nvPr/>
+      </p:nvGrpSpPr>
+      <p:grpSpPr/>
+      <p:sp>
+        <p:nvSpPr>
+          <p:cNvPr id="2" name="TextBox 1"/>
+          <p:cNvSpPr txBox="1"/>
+          <p:nvPr/>
+        </p:nvSpPr>
+        <p:spPr>
+          <a:xfrm>
+            <a:off x="548640" y="274320"/>
+            <a:ext cx="11064240" cy="822960"/>
+          </a:xfrm>
+          <a:prstGeom prst="rect">
+            <a:avLst/>
+          </a:prstGeom>
+          <a:noFill/>
+        </p:spPr>
+        <p:txBody>
+          <a:bodyPr wrap="square">
+            <a:spAutoFit/>
+          </a:bodyPr>
+          <a:lstStyle/>
+          <a:p>
+            <a:r>
+              <a:rPr sz="3000" b="1" i="0">
+                <a:solidFill>
+                  <a:srgbClr val="2B6CB0"/>
+                </a:solidFill>
+                <a:latin typeface="Calibri"/>
+              </a:rPr>
+              <a:t>Worked example 2</a:t>
+            </a:r>
+          </a:p>
+        </p:txBody>
+      </p:sp>
+      <p:sp>
+        <p:nvSpPr>
+          <p:cNvPr id="3" name="TextBox 2"/>
+          <p:cNvSpPr txBox="1"/>
+          <p:nvPr/>
+        </p:nvSpPr>
+        <p:spPr>
+          <a:xfrm>
+            <a:off x="640080" y="1280160"/>
+            <a:ext cx="10881360" cy="5120640"/>
+          </a:xfrm>
+          <a:prstGeom prst="rect">
+            <a:avLst/>
+          </a:prstGeom>
+          <a:noFill/>
+        </p:spPr>
+        <p:txBody>
+          <a:bodyPr wrap="square">
+            <a:spAutoFit/>
+          </a:bodyPr>
+          <a:lstStyle/>
+          <a:p>
+            <a:pPr/>
+            <a:r>
+              <a:rPr sz="2200" b="1">
+                <a:solidFill>
+                  <a:srgbClr val="2B6CB0"/>
+                </a:solidFill>
+                <a:latin typeface="Calibri"/>
+              </a:rPr>
+              <a:t>Tracing a JavaScript validation function</a:t>
+            </a:r>
+          </a:p>
+          <a:p>
+            <a:pPr lvl="1"/>
+            <a:r>
+              <a:rPr sz="1900" b="0">
+                <a:solidFill>
+                  <a:srgbClr val="222222"/>
+                </a:solidFill>
+                <a:latin typeface="Calibri"/>
+              </a:rPr>
+              <a:t>1. The function: function checkForm() { var name = document.getElementById("name").value; var age = Number(document.getElementById("age").value); if (name == "") { alert("Please enter your name"); return false; } if (age &lt; 11 || age &gt; 18) { alert("Age must be 11 to 18"); return false; } return true; }</a:t>
+            </a:r>
+          </a:p>
+          <a:p>
+            <a:pPr lvl="1"/>
+            <a:r>
+              <a:rPr sz="1900" b="0">
+                <a:solidFill>
+                  <a:srgbClr val="222222"/>
+                </a:solidFill>
+                <a:latin typeface="Calibri"/>
+              </a:rPr>
+              <a:t>2. It reads the two input boxes by id, converts age to a number, then tests each rule in turn.</a:t>
+            </a:r>
+          </a:p>
+          <a:p>
+            <a:pPr lvl="1"/>
+            <a:r>
+              <a:rPr sz="1900" b="0">
+                <a:solidFill>
+                  <a:srgbClr val="222222"/>
+                </a:solidFill>
+                <a:latin typeface="Calibri"/>
+              </a:rPr>
+              <a:t>3. Trace 1 — name is empty, age is 14: the first if is true, so the alert Please enter your name appears and the function returns false. The age test is never reached; the form does not submit.</a:t>
+            </a:r>
+          </a:p>
+          <a:p>
+            <a:pPr lvl="1"/>
+            <a:r>
+              <a:rPr sz="1900" b="0">
+                <a:solidFill>
+                  <a:srgbClr val="222222"/>
+                </a:solidFill>
+                <a:latin typeface="Calibri"/>
+              </a:rPr>
+              <a:t>4. Trace 2 — name is Sam, age is 21: name is not empty, so the first if is skipped. In the second if, 21 &lt; 11 is false but 21 &gt; 18 is true, so with OR the condition is true: alert Age must be 11 to 18, return false.</a:t>
+            </a:r>
+          </a:p>
+          <a:p>
+            <a:pPr lvl="1"/>
+            <a:r>
+              <a:rPr sz="1900" b="0">
+                <a:solidFill>
+                  <a:srgbClr val="222222"/>
+                </a:solidFill>
+                <a:latin typeface="Calibri"/>
+              </a:rPr>
+              <a:t>5. Trace 3 — name is Ada, age is 16: both ifs are false (16 is within 11 to 18), so the function returns true and the form submits.</a:t>
+            </a:r>
+          </a:p>
+          <a:p>
+            <a:pPr lvl="1"/>
+            <a:r>
+              <a:rPr sz="1900" b="0">
+                <a:solidFill>
+                  <a:srgbClr val="222222"/>
+                </a:solidFill>
+                <a:latin typeface="Calibri"/>
+              </a:rPr>
+              <a:t>6. Key idea: return false blocks submission, and the || means either failing bound rejects the age.</a:t>
+            </a:r>
+          </a:p>
+        </p:txBody>
+      </p:sp>
+    </p:spTree>
+  </p:cSld>
+  <p:clrMapOvr>
+    <a:masterClrMapping/>
+  </p:clrMapOvr>
+</p:sld>
+</file>
+
+<file path=ppt/slides/slide18.xml><?xml version="1.0" encoding="utf-8"?>
+<p:sld xmlns:a="http://schemas.openxmlformats.org/drawingml/2006/main" xmlns:p="http://schemas.openxmlformats.org/presentationml/2006/main" xmlns:r="http://schemas.openxmlformats.org/officeDocument/2006/relationships">
+  <p:cSld>
+    <p:bg>
+      <p:bgPr>
+        <a:solidFill>
+          <a:srgbClr val="FFFFFF"/>
+        </a:solidFill>
+        <a:effectLst/>
+      </p:bgPr>
+    </p:bg>
+    <p:spTree>
+      <p:nvGrpSpPr>
+        <p:cNvPr id="1" name=""/>
+        <p:cNvGrpSpPr/>
+        <p:nvPr/>
+      </p:nvGrpSpPr>
+      <p:grpSpPr/>
+      <p:sp>
+        <p:nvSpPr>
+          <p:cNvPr id="2" name="TextBox 1"/>
+          <p:cNvSpPr txBox="1"/>
+          <p:nvPr/>
+        </p:nvSpPr>
+        <p:spPr>
+          <a:xfrm>
+            <a:off x="548640" y="274320"/>
+            <a:ext cx="11064240" cy="822960"/>
+          </a:xfrm>
+          <a:prstGeom prst="rect">
+            <a:avLst/>
+          </a:prstGeom>
+          <a:noFill/>
+        </p:spPr>
+        <p:txBody>
+          <a:bodyPr wrap="square">
+            <a:spAutoFit/>
+          </a:bodyPr>
+          <a:lstStyle/>
+          <a:p>
+            <a:r>
+              <a:rPr sz="3000" b="1" i="0">
+                <a:solidFill>
+                  <a:srgbClr val="2B6CB0"/>
+                </a:solidFill>
+                <a:latin typeface="Calibri"/>
+              </a:rPr>
+              <a:t>Worked example 3</a:t>
+            </a:r>
+          </a:p>
+        </p:txBody>
+      </p:sp>
+      <p:sp>
+        <p:nvSpPr>
+          <p:cNvPr id="3" name="TextBox 2"/>
+          <p:cNvSpPr txBox="1"/>
+          <p:nvPr/>
+        </p:nvSpPr>
+        <p:spPr>
+          <a:xfrm>
+            <a:off x="640080" y="1280160"/>
+            <a:ext cx="10881360" cy="5120640"/>
+          </a:xfrm>
+          <a:prstGeom prst="rect">
+            <a:avLst/>
+          </a:prstGeom>
+          <a:noFill/>
+        </p:spPr>
+        <p:txBody>
+          <a:bodyPr wrap="square">
+            <a:spAutoFit/>
+          </a:bodyPr>
+          <a:lstStyle/>
+          <a:p>
+            <a:pPr/>
+            <a:r>
+              <a:rPr sz="2200" b="1">
+                <a:solidFill>
+                  <a:srgbClr val="2B6CB0"/>
+                </a:solidFill>
+                <a:latin typeface="Calibri"/>
+              </a:rPr>
+              <a:t>Client-side or server-side? A login flow</a:t>
+            </a:r>
+          </a:p>
+          <a:p>
+            <a:pPr lvl="1"/>
+            <a:r>
+              <a:rPr sz="1900" b="0">
+                <a:solidFill>
+                  <a:srgbClr val="222222"/>
+                </a:solidFill>
+                <a:latin typeface="Calibri"/>
+              </a:rPr>
+              <a:t>1. A login page asks for a username and password. Decide where each processing step belongs.</a:t>
+            </a:r>
+          </a:p>
+          <a:p>
+            <a:pPr lvl="1"/>
+            <a:r>
+              <a:rPr sz="1900" b="0">
+                <a:solidFill>
+                  <a:srgbClr val="222222"/>
+                </a:solidFill>
+                <a:latin typeface="Calibri"/>
+              </a:rPr>
+              <a:t>2. Checking the boxes are not empty before sending: client-side. It is not security-critical, gives instant feedback, and saves a pointless round trip, reducing server load.</a:t>
+            </a:r>
+          </a:p>
+          <a:p>
+            <a:pPr lvl="1"/>
+            <a:r>
+              <a:rPr sz="1900" b="0">
+                <a:solidFill>
+                  <a:srgbClr val="222222"/>
+                </a:solidFill>
+                <a:latin typeface="Calibri"/>
+              </a:rPr>
+              <a:t>3. Checking the password against the stored password hash: server-side, always. The stored hashes and comparison logic must stay hidden on the server.</a:t>
+            </a:r>
+          </a:p>
+          <a:p>
+            <a:pPr lvl="1"/>
+            <a:r>
+              <a:rPr sz="1900" b="0">
+                <a:solidFill>
+                  <a:srgbClr val="222222"/>
+                </a:solidFill>
+                <a:latin typeface="Calibri"/>
+              </a:rPr>
+              <a:t>4. Why it cannot be client-side: any code sent to the browser can be viewed, modified or bypassed, so a client-side check would expose the hash and could simply be skipped.</a:t>
+            </a:r>
+          </a:p>
+          <a:p>
+            <a:pPr lvl="1"/>
+            <a:r>
+              <a:rPr sz="1900" b="0">
+                <a:solidFill>
+                  <a:srgbClr val="222222"/>
+                </a:solidFill>
+                <a:latin typeface="Calibri"/>
+              </a:rPr>
+              <a:t>5. Recording the successful login in the accounts database: server-side, because the database lives on the server.</a:t>
+            </a:r>
+          </a:p>
+          <a:p>
+            <a:pPr lvl="1"/>
+            <a:r>
+              <a:rPr sz="1900" b="0">
+                <a:solidFill>
+                  <a:srgbClr val="222222"/>
+                </a:solidFill>
+                <a:latin typeface="Calibri"/>
+              </a:rPr>
+              <a:t>6. Conclusion: client-side for speed and user experience, server-side for anything secret, security-critical or database-driven — and security checks are repeated server-side even if the client also checks.</a:t>
+            </a:r>
+          </a:p>
+        </p:txBody>
+      </p:sp>
+    </p:spTree>
+  </p:cSld>
+  <p:clrMapOvr>
+    <a:masterClrMapping/>
+  </p:clrMapOvr>
+</p:sld>
+</file>
+
+<file path=ppt/slides/slide19.xml><?xml version="1.0" encoding="utf-8"?>
+<p:sld xmlns:a="http://schemas.openxmlformats.org/drawingml/2006/main" xmlns:p="http://schemas.openxmlformats.org/presentationml/2006/main" xmlns:r="http://schemas.openxmlformats.org/officeDocument/2006/relationships">
+  <p:cSld>
+    <p:bg>
+      <p:bgPr>
+        <a:solidFill>
+          <a:srgbClr val="FFFFFF"/>
+        </a:solidFill>
+        <a:effectLst/>
+      </p:bgPr>
+    </p:bg>
+    <p:spTree>
+      <p:nvGrpSpPr>
+        <p:cNvPr id="1" name=""/>
+        <p:cNvGrpSpPr/>
+        <p:nvPr/>
+      </p:nvGrpSpPr>
+      <p:grpSpPr/>
+      <p:sp>
+        <p:nvSpPr>
+          <p:cNvPr id="2" name="TextBox 1"/>
+          <p:cNvSpPr txBox="1"/>
+          <p:nvPr/>
+        </p:nvSpPr>
+        <p:spPr>
+          <a:xfrm>
+            <a:off x="548640" y="274320"/>
+            <a:ext cx="11064240" cy="822960"/>
+          </a:xfrm>
+          <a:prstGeom prst="rect">
+            <a:avLst/>
+          </a:prstGeom>
+          <a:noFill/>
+        </p:spPr>
+        <p:txBody>
+          <a:bodyPr wrap="square">
+            <a:spAutoFit/>
+          </a:bodyPr>
+          <a:lstStyle/>
+          <a:p>
+            <a:r>
+              <a:rPr sz="3000" b="1" i="0">
+                <a:solidFill>
+                  <a:srgbClr val="2B6CB0"/>
+                </a:solidFill>
+                <a:latin typeface="Calibri"/>
+              </a:rPr>
+              <a:t>Activity 1</a:t>
+            </a:r>
+          </a:p>
+        </p:txBody>
+      </p:sp>
+      <p:sp>
+        <p:nvSpPr>
+          <p:cNvPr id="3" name="TextBox 2"/>
+          <p:cNvSpPr txBox="1"/>
+          <p:nvPr/>
+        </p:nvSpPr>
+        <p:spPr>
+          <a:xfrm>
+            <a:off x="640080" y="1280160"/>
+            <a:ext cx="10881360" cy="5120640"/>
+          </a:xfrm>
+          <a:prstGeom prst="rect">
+            <a:avLst/>
+          </a:prstGeom>
+          <a:noFill/>
+        </p:spPr>
+        <p:txBody>
+          <a:bodyPr wrap="square">
+            <a:spAutoFit/>
+          </a:bodyPr>
+          <a:lstStyle/>
+          <a:p>
+            <a:pPr/>
+            <a:r>
+              <a:rPr sz="2200" b="1">
+                <a:solidFill>
+                  <a:srgbClr val="2B6CB0"/>
+                </a:solidFill>
+                <a:latin typeface="Calibri"/>
+              </a:rPr>
+              <a:t>HTML, CSS or JavaScript? Card sort  (12 min)</a:t>
+            </a:r>
+          </a:p>
+          <a:p>
+            <a:pPr lvl="1"/>
+            <a:r>
+              <a:rPr sz="2000" b="0">
+                <a:solidFill>
+                  <a:srgbClr val="222222"/>
+                </a:solidFill>
+                <a:latin typeface="Calibri"/>
+              </a:rPr>
+              <a:t>In pairs, make three column headers: HTML (structure), CSS (presentation), JavaScript (behaviour).</a:t>
+            </a:r>
+          </a:p>
+          <a:p>
+            <a:pPr lvl="1"/>
+            <a:r>
+              <a:rPr sz="2000" b="0">
+                <a:solidFill>
+                  <a:srgbClr val="222222"/>
+                </a:solidFill>
+                <a:latin typeface="Calibri"/>
+              </a:rPr>
+              <a:t>Sort 15 slips: &lt;h1&gt;Results&lt;/h1&gt;; color: red;; alert("Saved!"); &lt;img src="cat.jpg"&gt;; #menu { width: 200px; }; a click event handler; &lt;a href="page2.html"&gt;Next&lt;/a&gt;; choosing the page font; checking a field contains @ before submission; .warning { font-weight: bold; }; &lt;p&gt; tags; updating content without reloading; &lt;div id="header"&gt;; centring the layout; responding to a key press.</a:t>
+            </a:r>
+          </a:p>
+          <a:p>
+            <a:pPr lvl="1"/>
+            <a:r>
+              <a:rPr sz="2000" b="0">
+                <a:solidFill>
+                  <a:srgbClr val="222222"/>
+                </a:solidFill>
+                <a:latin typeface="Calibri"/>
+              </a:rPr>
+              <a:t>Add a fourth wildcard header, server-side, and decide whether any slip could belong there instead (the @ check should also be repeated server-side).</a:t>
+            </a:r>
+          </a:p>
+          <a:p>
+            <a:pPr lvl="1"/>
+            <a:r>
+              <a:rPr sz="2000" b="0">
+                <a:solidFill>
+                  <a:srgbClr val="222222"/>
+                </a:solidFill>
+                <a:latin typeface="Calibri"/>
+              </a:rPr>
+              <a:t>Reveal and resolve disputes, then discuss why we separate the three at all: restyling without touching structure or behaviour.</a:t>
+            </a:r>
+          </a:p>
+          <a:p>
+            <a:pPr/>
+            <a:r>
+              <a:rPr sz="1800" b="0">
                 <a:solidFill>
                   <a:srgbClr val="B76E00"/>
                 </a:solidFill>
                 <a:latin typeface="Calibri"/>
               </a:rPr>
-              <a:t>Answer: Each page's rank is recalculated repeatedly using the latest rank values of the pages linking to it, and it stops when the values stop changing significantly (converge).</a:t>
-            </a:r>
-          </a:p>
-          <a:p>
-            <a:r>
-              <a:rPr sz="2200" b="1">
-                <a:solidFill>
-                  <a:srgbClr val="222222"/>
-                </a:solidFill>
-                <a:latin typeface="Calibri"/>
-              </a:rPr>
-              <a:t>2. Give one advantage and one disadvantage of client-side over server-side processing.</a:t>
-            </a:r>
-          </a:p>
-          <a:p>
-            <a:pPr lvl="1"/>
-            <a:r>
-              <a:rPr sz="1800" i="1">
-                <a:solidFill>
-                  <a:srgbClr val="B76E00"/>
-                </a:solidFill>
-                <a:latin typeface="Calibri"/>
-              </a:rPr>
-              <a:t>Answer: Advantage: faster/immediate response and reduced server load. Disadvantage: insecure as it can be viewed/bypassed, and it depends on the user's browser/device.</a:t>
-            </a:r>
-          </a:p>
-          <a:p>
-            <a:r>
-              <a:rPr sz="2200" b="1">
-                <a:solidFill>
-                  <a:srgbClr val="222222"/>
-                </a:solidFill>
-                <a:latin typeface="Calibri"/>
-              </a:rPr>
-              <a:t>3. What does a '#' CSS selector target, and what do '.' and a bare name target?</a:t>
-            </a:r>
-          </a:p>
-          <a:p>
-            <a:pPr lvl="1"/>
-            <a:r>
-              <a:rPr sz="1800" i="1">
-                <a:solidFill>
-                  <a:srgbClr val="B76E00"/>
-                </a:solidFill>
-                <a:latin typeface="Calibri"/>
-              </a:rPr>
-              <a:t>Answer: '#' targets an element by its id; '.' targets by class; a bare name targets by tag.</a:t>
+              <a:t>Stretch: Add two extra slips, script and link rel="stylesheet", and place them: where do the three technologies actually live inside one HTML file?</a:t>
             </a:r>
           </a:p>
         </p:txBody>
@@ -3854,7 +5060,7 @@
                 </a:solidFill>
                 <a:latin typeface="Calibri"/>
               </a:rPr>
-              <a:t>Explain the roles of HTML, CSS and JavaScript and how CSS selectors target tags, classes and ids.</a:t>
+              <a:t>I can describe how a browser requests a page from a web server and the roles of HTML, CSS and JavaScript.</a:t>
             </a:r>
           </a:p>
           <a:p>
@@ -3866,7 +5072,7 @@
                 </a:solidFill>
                 <a:latin typeface="Calibri"/>
               </a:rPr>
-              <a:t>Describe how search engines index pages and how the PageRank algorithm ranks them.</a:t>
+              <a:t>I can write and interpret HTML using the tags and attributes OCR names, correctly nested.</a:t>
             </a:r>
           </a:p>
           <a:p>
@@ -3878,7 +5084,1453 @@
                 </a:solidFill>
                 <a:latin typeface="Calibri"/>
               </a:rPr>
-              <a:t>Compare client-side and server-side processing and justify where each should be used.</a:t>
+              <a:t>I can style a page with CSS element, class and id selectors placed inline, internally or in an external stylesheet.</a:t>
+            </a:r>
+          </a:p>
+          <a:p>
+            <a:pPr lvl="1"/>
+            <a:r>
+              <a:rPr sz="2200" b="0">
+                <a:solidFill>
+                  <a:srgbClr val="222222"/>
+                </a:solidFill>
+                <a:latin typeface="Calibri"/>
+              </a:rPr>
+              <a:t>I can write simple JavaScript including form validation, and compare client-side with server-side processing.</a:t>
+            </a:r>
+          </a:p>
+        </p:txBody>
+      </p:sp>
+    </p:spTree>
+  </p:cSld>
+  <p:clrMapOvr>
+    <a:masterClrMapping/>
+  </p:clrMapOvr>
+</p:sld>
+</file>
+
+<file path=ppt/slides/slide20.xml><?xml version="1.0" encoding="utf-8"?>
+<p:sld xmlns:a="http://schemas.openxmlformats.org/drawingml/2006/main" xmlns:p="http://schemas.openxmlformats.org/presentationml/2006/main" xmlns:r="http://schemas.openxmlformats.org/officeDocument/2006/relationships">
+  <p:cSld>
+    <p:bg>
+      <p:bgPr>
+        <a:solidFill>
+          <a:srgbClr val="FFFFFF"/>
+        </a:solidFill>
+        <a:effectLst/>
+      </p:bgPr>
+    </p:bg>
+    <p:spTree>
+      <p:nvGrpSpPr>
+        <p:cNvPr id="1" name=""/>
+        <p:cNvGrpSpPr/>
+        <p:nvPr/>
+      </p:nvGrpSpPr>
+      <p:grpSpPr/>
+      <p:sp>
+        <p:nvSpPr>
+          <p:cNvPr id="2" name="TextBox 1"/>
+          <p:cNvSpPr txBox="1"/>
+          <p:nvPr/>
+        </p:nvSpPr>
+        <p:spPr>
+          <a:xfrm>
+            <a:off x="548640" y="274320"/>
+            <a:ext cx="11064240" cy="822960"/>
+          </a:xfrm>
+          <a:prstGeom prst="rect">
+            <a:avLst/>
+          </a:prstGeom>
+          <a:noFill/>
+        </p:spPr>
+        <p:txBody>
+          <a:bodyPr wrap="square">
+            <a:spAutoFit/>
+          </a:bodyPr>
+          <a:lstStyle/>
+          <a:p>
+            <a:r>
+              <a:rPr sz="3000" b="1" i="0">
+                <a:solidFill>
+                  <a:srgbClr val="2B6CB0"/>
+                </a:solidFill>
+                <a:latin typeface="Calibri"/>
+              </a:rPr>
+              <a:t>Activity 2</a:t>
+            </a:r>
+          </a:p>
+        </p:txBody>
+      </p:sp>
+      <p:sp>
+        <p:nvSpPr>
+          <p:cNvPr id="3" name="TextBox 2"/>
+          <p:cNvSpPr txBox="1"/>
+          <p:nvPr/>
+        </p:nvSpPr>
+        <p:spPr>
+          <a:xfrm>
+            <a:off x="640080" y="1280160"/>
+            <a:ext cx="10881360" cy="5120640"/>
+          </a:xfrm>
+          <a:prstGeom prst="rect">
+            <a:avLst/>
+          </a:prstGeom>
+          <a:noFill/>
+        </p:spPr>
+        <p:txBody>
+          <a:bodyPr wrap="square">
+            <a:spAutoFit/>
+          </a:bodyPr>
+          <a:lstStyle/>
+          <a:p>
+            <a:pPr/>
+            <a:r>
+              <a:rPr sz="2200" b="1">
+                <a:solidFill>
+                  <a:srgbClr val="2B6CB0"/>
+                </a:solidFill>
+                <a:latin typeface="Calibri"/>
+              </a:rPr>
+              <a:t>Broken homepage: spot and fix  (10 min)</a:t>
+            </a:r>
+          </a:p>
+          <a:p>
+            <a:pPr lvl="1"/>
+            <a:r>
+              <a:rPr sz="2000" b="0">
+                <a:solidFill>
+                  <a:srgbClr val="222222"/>
+                </a:solidFill>
+                <a:latin typeface="Calibri"/>
+              </a:rPr>
+              <a:t>Display the intern's homepage and announce there are exactly five errors; pairs list line numbers and fixes on mini-whiteboards.</a:t>
+            </a:r>
+          </a:p>
+          <a:p>
+            <a:pPr lvl="1"/>
+            <a:r>
+              <a:rPr sz="2000" b="0">
+                <a:solidFill>
+                  <a:srgbClr val="222222"/>
+                </a:solidFill>
+                <a:latin typeface="Calibri"/>
+              </a:rPr>
+              <a:t>The snippet: &lt;html&gt; &lt;head&gt;&lt;title&gt;My Page&lt;/head&gt;&lt;/title&gt; &lt;style&gt;.big { colour: red }&lt;/style&gt; &lt;body&gt; &lt;h1&gt;Welcome&lt;h1&gt; &lt;img href="cat.jpg"&gt; &lt;a src="page2.html"&gt;Next page&lt;/a&gt; &lt;/body&gt; &lt;/html&gt;</a:t>
+            </a:r>
+          </a:p>
+          <a:p>
+            <a:pPr lvl="1"/>
+            <a:r>
+              <a:rPr sz="2000" b="0">
+                <a:solidFill>
+                  <a:srgbClr val="222222"/>
+                </a:solidFill>
+                <a:latin typeface="Calibri"/>
+              </a:rPr>
+              <a:t>Pairs hold up boards; tally the most-spotted and least-spotted errors, then a volunteer pair writes the corrected page on the board.</a:t>
+            </a:r>
+          </a:p>
+          <a:p>
+            <a:pPr lvl="1"/>
+            <a:r>
+              <a:rPr sz="2000" b="0">
+                <a:solidFill>
+                  <a:srgbClr val="222222"/>
+                </a:solidFill>
+                <a:latin typeface="Calibri"/>
+              </a:rPr>
+              <a:t>The five fixes: closing tags wrongly nested, should be &lt;/title&gt;&lt;/head&gt;; the CSS property is color not colour; the second &lt;h1&gt; needs a slash, &lt;/h1&gt;; img uses src not href; a uses href not src. Note that browsers often render broken HTML anyway, which is why these bugs ship.</a:t>
+            </a:r>
+          </a:p>
+          <a:p>
+            <a:pPr/>
+            <a:r>
+              <a:rPr sz="1800" b="0">
+                <a:solidFill>
+                  <a:srgbClr val="B76E00"/>
+                </a:solidFill>
+                <a:latin typeface="Calibri"/>
+              </a:rPr>
+              <a:t>Stretch: Add a class attribute so the heading actually uses the .big rule, then add an id to a tag with a matching # rule in the style block.</a:t>
+            </a:r>
+          </a:p>
+        </p:txBody>
+      </p:sp>
+    </p:spTree>
+  </p:cSld>
+  <p:clrMapOvr>
+    <a:masterClrMapping/>
+  </p:clrMapOvr>
+</p:sld>
+</file>
+
+<file path=ppt/slides/slide21.xml><?xml version="1.0" encoding="utf-8"?>
+<p:sld xmlns:a="http://schemas.openxmlformats.org/drawingml/2006/main" xmlns:p="http://schemas.openxmlformats.org/presentationml/2006/main" xmlns:r="http://schemas.openxmlformats.org/officeDocument/2006/relationships">
+  <p:cSld>
+    <p:bg>
+      <p:bgPr>
+        <a:solidFill>
+          <a:srgbClr val="FFFFFF"/>
+        </a:solidFill>
+        <a:effectLst/>
+      </p:bgPr>
+    </p:bg>
+    <p:spTree>
+      <p:nvGrpSpPr>
+        <p:cNvPr id="1" name=""/>
+        <p:cNvGrpSpPr/>
+        <p:nvPr/>
+      </p:nvGrpSpPr>
+      <p:grpSpPr/>
+      <p:sp>
+        <p:nvSpPr>
+          <p:cNvPr id="2" name="TextBox 1"/>
+          <p:cNvSpPr txBox="1"/>
+          <p:nvPr/>
+        </p:nvSpPr>
+        <p:spPr>
+          <a:xfrm>
+            <a:off x="548640" y="274320"/>
+            <a:ext cx="11064240" cy="822960"/>
+          </a:xfrm>
+          <a:prstGeom prst="rect">
+            <a:avLst/>
+          </a:prstGeom>
+          <a:noFill/>
+        </p:spPr>
+        <p:txBody>
+          <a:bodyPr wrap="square">
+            <a:spAutoFit/>
+          </a:bodyPr>
+          <a:lstStyle/>
+          <a:p>
+            <a:r>
+              <a:rPr sz="3000" b="1" i="0">
+                <a:solidFill>
+                  <a:srgbClr val="2B6CB0"/>
+                </a:solidFill>
+                <a:latin typeface="Calibri"/>
+              </a:rPr>
+              <a:t>Activity 3</a:t>
+            </a:r>
+          </a:p>
+        </p:txBody>
+      </p:sp>
+      <p:sp>
+        <p:nvSpPr>
+          <p:cNvPr id="3" name="TextBox 2"/>
+          <p:cNvSpPr txBox="1"/>
+          <p:nvPr/>
+        </p:nvSpPr>
+        <p:spPr>
+          <a:xfrm>
+            <a:off x="640080" y="1280160"/>
+            <a:ext cx="10881360" cy="5120640"/>
+          </a:xfrm>
+          <a:prstGeom prst="rect">
+            <a:avLst/>
+          </a:prstGeom>
+          <a:noFill/>
+        </p:spPr>
+        <p:txBody>
+          <a:bodyPr wrap="square">
+            <a:spAutoFit/>
+          </a:bodyPr>
+          <a:lstStyle/>
+          <a:p>
+            <a:pPr/>
+            <a:r>
+              <a:rPr sz="2200" b="1">
+                <a:solidFill>
+                  <a:srgbClr val="2B6CB0"/>
+                </a:solidFill>
+                <a:latin typeface="Calibri"/>
+              </a:rPr>
+              <a:t>Client-side vs server-side continuum  (12 min)</a:t>
+            </a:r>
+          </a:p>
+          <a:p>
+            <a:pPr lvl="1"/>
+            <a:r>
+              <a:rPr sz="2000" b="0">
+                <a:solidFill>
+                  <a:srgbClr val="222222"/>
+                </a:solidFill>
+                <a:latin typeface="Calibri"/>
+              </a:rPr>
+              <a:t>Tape a line across the room: client-side at one end, server-side at the other; standing in the middle means needs both.</a:t>
+            </a:r>
+          </a:p>
+          <a:p>
+            <a:pPr lvl="1"/>
+            <a:r>
+              <a:rPr sz="2000" b="0">
+                <a:solidFill>
+                  <a:srgbClr val="222222"/>
+                </a:solidFill>
+                <a:latin typeface="Calibri"/>
+              </a:rPr>
+              <a:t>Think for 30 seconds, pair for 30, then stand on the line for each scenario: highlighting a menu button on hover; checking a typed password against the stored hash; warning that the email field is empty; searching the product database for trainers; validating a card payment; form validation on a banking site.</a:t>
+            </a:r>
+          </a:p>
+          <a:p>
+            <a:pPr lvl="1"/>
+            <a:r>
+              <a:rPr sz="2000" b="0">
+                <a:solidFill>
+                  <a:srgbClr val="222222"/>
+                </a:solidFill>
+                <a:latin typeface="Calibri"/>
+              </a:rPr>
+              <a:t>Interview outliers each round: what happens to the server if we move this to the client, and what happens to security?</a:t>
+            </a:r>
+          </a:p>
+          <a:p>
+            <a:pPr lvl="1"/>
+            <a:r>
+              <a:rPr sz="2000" b="0">
+                <a:solidFill>
+                  <a:srgbClr val="222222"/>
+                </a:solidFill>
+                <a:latin typeface="Calibri"/>
+              </a:rPr>
+              <a:t>Board the trade-off summary: speed, responsiveness and reduced server load versus security and access to the database. The banking form is the exam-grade answer: both — client-side for fast feedback, repeated server-side because browser code can be bypassed.</a:t>
+            </a:r>
+          </a:p>
+          <a:p>
+            <a:pPr/>
+            <a:r>
+              <a:rPr sz="1800" b="0">
+                <a:solidFill>
+                  <a:srgbClr val="B76E00"/>
+                </a:solidFill>
+                <a:latin typeface="Calibri"/>
+              </a:rPr>
+              <a:t>Stretch: Debate in one line: if server-side is more secure, why not do everything server-side? (Latency, server load, bandwidth, offline responsiveness.)</a:t>
+            </a:r>
+          </a:p>
+        </p:txBody>
+      </p:sp>
+    </p:spTree>
+  </p:cSld>
+  <p:clrMapOvr>
+    <a:masterClrMapping/>
+  </p:clrMapOvr>
+</p:sld>
+</file>
+
+<file path=ppt/slides/slide22.xml><?xml version="1.0" encoding="utf-8"?>
+<p:sld xmlns:a="http://schemas.openxmlformats.org/drawingml/2006/main" xmlns:p="http://schemas.openxmlformats.org/presentationml/2006/main" xmlns:r="http://schemas.openxmlformats.org/officeDocument/2006/relationships">
+  <p:cSld>
+    <p:bg>
+      <p:bgPr>
+        <a:solidFill>
+          <a:srgbClr val="FFFFFF"/>
+        </a:solidFill>
+        <a:effectLst/>
+      </p:bgPr>
+    </p:bg>
+    <p:spTree>
+      <p:nvGrpSpPr>
+        <p:cNvPr id="1" name=""/>
+        <p:cNvGrpSpPr/>
+        <p:nvPr/>
+      </p:nvGrpSpPr>
+      <p:grpSpPr/>
+      <p:sp>
+        <p:nvSpPr>
+          <p:cNvPr id="2" name="TextBox 1"/>
+          <p:cNvSpPr txBox="1"/>
+          <p:nvPr/>
+        </p:nvSpPr>
+        <p:spPr>
+          <a:xfrm>
+            <a:off x="548640" y="274320"/>
+            <a:ext cx="11064240" cy="822960"/>
+          </a:xfrm>
+          <a:prstGeom prst="rect">
+            <a:avLst/>
+          </a:prstGeom>
+          <a:noFill/>
+        </p:spPr>
+        <p:txBody>
+          <a:bodyPr wrap="square">
+            <a:spAutoFit/>
+          </a:bodyPr>
+          <a:lstStyle/>
+          <a:p>
+            <a:r>
+              <a:rPr sz="3000" b="1" i="0">
+                <a:solidFill>
+                  <a:srgbClr val="2B6CB0"/>
+                </a:solidFill>
+                <a:latin typeface="Calibri"/>
+              </a:rPr>
+              <a:t>Practice (1-4)</a:t>
+            </a:r>
+          </a:p>
+        </p:txBody>
+      </p:sp>
+      <p:sp>
+        <p:nvSpPr>
+          <p:cNvPr id="3" name="TextBox 2"/>
+          <p:cNvSpPr txBox="1"/>
+          <p:nvPr/>
+        </p:nvSpPr>
+        <p:spPr>
+          <a:xfrm>
+            <a:off x="640080" y="1280160"/>
+            <a:ext cx="10881360" cy="5120640"/>
+          </a:xfrm>
+          <a:prstGeom prst="rect">
+            <a:avLst/>
+          </a:prstGeom>
+          <a:noFill/>
+        </p:spPr>
+        <p:txBody>
+          <a:bodyPr wrap="square">
+            <a:spAutoFit/>
+          </a:bodyPr>
+          <a:lstStyle/>
+          <a:p>
+            <a:r>
+              <a:rPr sz="2000" b="1">
+                <a:solidFill>
+                  <a:srgbClr val="222222"/>
+                </a:solidFill>
+                <a:latin typeface="Calibri"/>
+              </a:rPr>
+              <a:t>1. State the purpose of each of HTML, CSS and JavaScript in a web page. [3]</a:t>
+            </a:r>
+          </a:p>
+          <a:p>
+            <a:r>
+              <a:rPr sz="2000" b="1">
+                <a:solidFill>
+                  <a:srgbClr val="222222"/>
+                </a:solidFill>
+                <a:latin typeface="Calibri"/>
+              </a:rPr>
+              <a:t>2. Write the HTML to display an image stored as logo.png, with the alternative text School logo. [2]</a:t>
+            </a:r>
+          </a:p>
+          <a:p>
+            <a:r>
+              <a:rPr sz="2000" b="1">
+                <a:solidFill>
+                  <a:srgbClr val="222222"/>
+                </a:solidFill>
+                <a:latin typeface="Calibri"/>
+              </a:rPr>
+              <a:t>3. A stylesheet contains the rule .alert { color: red; }. Describe how a developer applies this rule to a paragraph, and explain one difference between a class and an id. [3]</a:t>
+            </a:r>
+          </a:p>
+          <a:p>
+            <a:r>
+              <a:rPr sz="2000" b="1">
+                <a:solidFill>
+                  <a:srgbClr val="222222"/>
+                </a:solidFill>
+                <a:latin typeface="Calibri"/>
+              </a:rPr>
+              <a:t>4. Write a CSS rule that gives the element with the identifier menu a width of 200 pixels and a grey background. [3]</a:t>
+            </a:r>
+          </a:p>
+        </p:txBody>
+      </p:sp>
+    </p:spTree>
+  </p:cSld>
+  <p:clrMapOvr>
+    <a:masterClrMapping/>
+  </p:clrMapOvr>
+</p:sld>
+</file>
+
+<file path=ppt/slides/slide23.xml><?xml version="1.0" encoding="utf-8"?>
+<p:sld xmlns:a="http://schemas.openxmlformats.org/drawingml/2006/main" xmlns:p="http://schemas.openxmlformats.org/presentationml/2006/main" xmlns:r="http://schemas.openxmlformats.org/officeDocument/2006/relationships">
+  <p:cSld>
+    <p:bg>
+      <p:bgPr>
+        <a:solidFill>
+          <a:srgbClr val="FFFFFF"/>
+        </a:solidFill>
+        <a:effectLst/>
+      </p:bgPr>
+    </p:bg>
+    <p:spTree>
+      <p:nvGrpSpPr>
+        <p:cNvPr id="1" name=""/>
+        <p:cNvGrpSpPr/>
+        <p:nvPr/>
+      </p:nvGrpSpPr>
+      <p:grpSpPr/>
+      <p:sp>
+        <p:nvSpPr>
+          <p:cNvPr id="2" name="TextBox 1"/>
+          <p:cNvSpPr txBox="1"/>
+          <p:nvPr/>
+        </p:nvSpPr>
+        <p:spPr>
+          <a:xfrm>
+            <a:off x="548640" y="274320"/>
+            <a:ext cx="11064240" cy="822960"/>
+          </a:xfrm>
+          <a:prstGeom prst="rect">
+            <a:avLst/>
+          </a:prstGeom>
+          <a:noFill/>
+        </p:spPr>
+        <p:txBody>
+          <a:bodyPr wrap="square">
+            <a:spAutoFit/>
+          </a:bodyPr>
+          <a:lstStyle/>
+          <a:p>
+            <a:r>
+              <a:rPr sz="3000" b="1" i="0">
+                <a:solidFill>
+                  <a:srgbClr val="2B6CB0"/>
+                </a:solidFill>
+                <a:latin typeface="Calibri"/>
+              </a:rPr>
+              <a:t>Practice — answers (1-4)</a:t>
+            </a:r>
+          </a:p>
+        </p:txBody>
+      </p:sp>
+      <p:sp>
+        <p:nvSpPr>
+          <p:cNvPr id="3" name="TextBox 2"/>
+          <p:cNvSpPr txBox="1"/>
+          <p:nvPr/>
+        </p:nvSpPr>
+        <p:spPr>
+          <a:xfrm>
+            <a:off x="640080" y="1280160"/>
+            <a:ext cx="10881360" cy="5120640"/>
+          </a:xfrm>
+          <a:prstGeom prst="rect">
+            <a:avLst/>
+          </a:prstGeom>
+          <a:noFill/>
+        </p:spPr>
+        <p:txBody>
+          <a:bodyPr wrap="square">
+            <a:spAutoFit/>
+          </a:bodyPr>
+          <a:lstStyle/>
+          <a:p>
+            <a:r>
+              <a:rPr sz="2000" b="1">
+                <a:solidFill>
+                  <a:srgbClr val="222222"/>
+                </a:solidFill>
+                <a:latin typeface="Calibri"/>
+              </a:rPr>
+              <a:t>1. State the purpose of each of HTML, CSS and JavaScript in a web page. [3]</a:t>
+            </a:r>
+          </a:p>
+          <a:p>
+            <a:pPr lvl="1"/>
+            <a:r>
+              <a:rPr sz="1800" i="1">
+                <a:solidFill>
+                  <a:srgbClr val="B76E00"/>
+                </a:solidFill>
+                <a:latin typeface="Calibri"/>
+              </a:rPr>
+              <a:t>Answer: HTML defines the structure and content of the page (1); CSS defines the presentation/style such as colours, fonts and layout (1); JavaScript adds interactivity/behaviour such as responding to events and validating forms (1).</a:t>
+            </a:r>
+          </a:p>
+          <a:p>
+            <a:r>
+              <a:rPr sz="2000" b="1">
+                <a:solidFill>
+                  <a:srgbClr val="222222"/>
+                </a:solidFill>
+                <a:latin typeface="Calibri"/>
+              </a:rPr>
+              <a:t>2. Write the HTML to display an image stored as logo.png, with the alternative text School logo. [2]</a:t>
+            </a:r>
+          </a:p>
+          <a:p>
+            <a:pPr lvl="1"/>
+            <a:r>
+              <a:rPr sz="1800" i="1">
+                <a:solidFill>
+                  <a:srgbClr val="B76E00"/>
+                </a:solidFill>
+                <a:latin typeface="Calibri"/>
+              </a:rPr>
+              <a:t>Answer: &lt;img src="logo.png" alt="School logo"&gt; — one mark for the img tag with correct src attribute, one for the alt attribute.</a:t>
+            </a:r>
+          </a:p>
+          <a:p>
+            <a:r>
+              <a:rPr sz="2000" b="1">
+                <a:solidFill>
+                  <a:srgbClr val="222222"/>
+                </a:solidFill>
+                <a:latin typeface="Calibri"/>
+              </a:rPr>
+              <a:t>3. A stylesheet contains the rule .alert { color: red; }. Describe how a developer applies this rule to a paragraph, and explain one difference between a class and an id. [3]</a:t>
+            </a:r>
+          </a:p>
+          <a:p>
+            <a:pPr lvl="1"/>
+            <a:r>
+              <a:rPr sz="1800" i="1">
+                <a:solidFill>
+                  <a:srgbClr val="B76E00"/>
+                </a:solidFill>
+                <a:latin typeface="Calibri"/>
+              </a:rPr>
+              <a:t>Answer: Add the attribute to the tag: &lt;p class="alert"&gt; (1). A class can be reused on many elements on the page (1), whereas an id must be unique — used on only one element — and is targeted with # rather than . (1).</a:t>
+            </a:r>
+          </a:p>
+          <a:p>
+            <a:r>
+              <a:rPr sz="2000" b="1">
+                <a:solidFill>
+                  <a:srgbClr val="222222"/>
+                </a:solidFill>
+                <a:latin typeface="Calibri"/>
+              </a:rPr>
+              <a:t>4. Write a CSS rule that gives the element with the identifier menu a width of 200 pixels and a grey background. [3]</a:t>
+            </a:r>
+          </a:p>
+          <a:p>
+            <a:pPr lvl="1"/>
+            <a:r>
+              <a:rPr sz="1800" i="1">
+                <a:solidFill>
+                  <a:srgbClr val="B76E00"/>
+                </a:solidFill>
+                <a:latin typeface="Calibri"/>
+              </a:rPr>
+              <a:t>Answer: #menu { width: 200px; background-color: grey; } — one mark for the #menu selector, one for width: 200px;, one for background-color: grey;.</a:t>
+            </a:r>
+          </a:p>
+        </p:txBody>
+      </p:sp>
+    </p:spTree>
+  </p:cSld>
+  <p:clrMapOvr>
+    <a:masterClrMapping/>
+  </p:clrMapOvr>
+</p:sld>
+</file>
+
+<file path=ppt/slides/slide24.xml><?xml version="1.0" encoding="utf-8"?>
+<p:sld xmlns:a="http://schemas.openxmlformats.org/drawingml/2006/main" xmlns:p="http://schemas.openxmlformats.org/presentationml/2006/main" xmlns:r="http://schemas.openxmlformats.org/officeDocument/2006/relationships">
+  <p:cSld>
+    <p:bg>
+      <p:bgPr>
+        <a:solidFill>
+          <a:srgbClr val="FFFFFF"/>
+        </a:solidFill>
+        <a:effectLst/>
+      </p:bgPr>
+    </p:bg>
+    <p:spTree>
+      <p:nvGrpSpPr>
+        <p:cNvPr id="1" name=""/>
+        <p:cNvGrpSpPr/>
+        <p:nvPr/>
+      </p:nvGrpSpPr>
+      <p:grpSpPr/>
+      <p:sp>
+        <p:nvSpPr>
+          <p:cNvPr id="2" name="TextBox 1"/>
+          <p:cNvSpPr txBox="1"/>
+          <p:nvPr/>
+        </p:nvSpPr>
+        <p:spPr>
+          <a:xfrm>
+            <a:off x="548640" y="274320"/>
+            <a:ext cx="11064240" cy="822960"/>
+          </a:xfrm>
+          <a:prstGeom prst="rect">
+            <a:avLst/>
+          </a:prstGeom>
+          <a:noFill/>
+        </p:spPr>
+        <p:txBody>
+          <a:bodyPr wrap="square">
+            <a:spAutoFit/>
+          </a:bodyPr>
+          <a:lstStyle/>
+          <a:p>
+            <a:r>
+              <a:rPr sz="3000" b="1" i="0">
+                <a:solidFill>
+                  <a:srgbClr val="2B6CB0"/>
+                </a:solidFill>
+                <a:latin typeface="Calibri"/>
+              </a:rPr>
+              <a:t>Practice (5-8)</a:t>
+            </a:r>
+          </a:p>
+        </p:txBody>
+      </p:sp>
+      <p:sp>
+        <p:nvSpPr>
+          <p:cNvPr id="3" name="TextBox 2"/>
+          <p:cNvSpPr txBox="1"/>
+          <p:nvPr/>
+        </p:nvSpPr>
+        <p:spPr>
+          <a:xfrm>
+            <a:off x="640080" y="1280160"/>
+            <a:ext cx="10881360" cy="5120640"/>
+          </a:xfrm>
+          <a:prstGeom prst="rect">
+            <a:avLst/>
+          </a:prstGeom>
+          <a:noFill/>
+        </p:spPr>
+        <p:txBody>
+          <a:bodyPr wrap="square">
+            <a:spAutoFit/>
+          </a:bodyPr>
+          <a:lstStyle/>
+          <a:p>
+            <a:r>
+              <a:rPr sz="2000" b="1">
+                <a:solidFill>
+                  <a:srgbClr val="222222"/>
+                </a:solidFill>
+                <a:latin typeface="Calibri"/>
+              </a:rPr>
+              <a:t>1. Write a JavaScript function named checkEmail that displays an alert saying Please enter your email if the text box with the id email is empty. [4]</a:t>
+            </a:r>
+          </a:p>
+          <a:p>
+            <a:r>
+              <a:rPr sz="2000" b="1">
+                <a:solidFill>
+                  <a:srgbClr val="222222"/>
+                </a:solidFill>
+                <a:latin typeface="Calibri"/>
+              </a:rPr>
+              <a:t>2. Explain two advantages of validating a form using client-side JavaScript rather than on the server. [4]</a:t>
+            </a:r>
+          </a:p>
+          <a:p>
+            <a:r>
+              <a:rPr sz="2000" b="1">
+                <a:solidFill>
+                  <a:srgbClr val="222222"/>
+                </a:solidFill>
+                <a:latin typeface="Calibri"/>
+              </a:rPr>
+              <a:t>3. A website checks a user's password when they log in. Explain why this check must be carried out server-side. [3]</a:t>
+            </a:r>
+          </a:p>
+          <a:p>
+            <a:r>
+              <a:rPr sz="2000" b="1">
+                <a:solidFill>
+                  <a:srgbClr val="222222"/>
+                </a:solidFill>
+                <a:latin typeface="Calibri"/>
+              </a:rPr>
+              <a:t>4. Describe the difference between an internal and an external stylesheet, and give one advantage of using an external stylesheet. [3]</a:t>
+            </a:r>
+          </a:p>
+        </p:txBody>
+      </p:sp>
+    </p:spTree>
+  </p:cSld>
+  <p:clrMapOvr>
+    <a:masterClrMapping/>
+  </p:clrMapOvr>
+</p:sld>
+</file>
+
+<file path=ppt/slides/slide25.xml><?xml version="1.0" encoding="utf-8"?>
+<p:sld xmlns:a="http://schemas.openxmlformats.org/drawingml/2006/main" xmlns:p="http://schemas.openxmlformats.org/presentationml/2006/main" xmlns:r="http://schemas.openxmlformats.org/officeDocument/2006/relationships">
+  <p:cSld>
+    <p:bg>
+      <p:bgPr>
+        <a:solidFill>
+          <a:srgbClr val="FFFFFF"/>
+        </a:solidFill>
+        <a:effectLst/>
+      </p:bgPr>
+    </p:bg>
+    <p:spTree>
+      <p:nvGrpSpPr>
+        <p:cNvPr id="1" name=""/>
+        <p:cNvGrpSpPr/>
+        <p:nvPr/>
+      </p:nvGrpSpPr>
+      <p:grpSpPr/>
+      <p:sp>
+        <p:nvSpPr>
+          <p:cNvPr id="2" name="TextBox 1"/>
+          <p:cNvSpPr txBox="1"/>
+          <p:nvPr/>
+        </p:nvSpPr>
+        <p:spPr>
+          <a:xfrm>
+            <a:off x="548640" y="274320"/>
+            <a:ext cx="11064240" cy="822960"/>
+          </a:xfrm>
+          <a:prstGeom prst="rect">
+            <a:avLst/>
+          </a:prstGeom>
+          <a:noFill/>
+        </p:spPr>
+        <p:txBody>
+          <a:bodyPr wrap="square">
+            <a:spAutoFit/>
+          </a:bodyPr>
+          <a:lstStyle/>
+          <a:p>
+            <a:r>
+              <a:rPr sz="3000" b="1" i="0">
+                <a:solidFill>
+                  <a:srgbClr val="2B6CB0"/>
+                </a:solidFill>
+                <a:latin typeface="Calibri"/>
+              </a:rPr>
+              <a:t>Practice — answers (5-8)</a:t>
+            </a:r>
+          </a:p>
+        </p:txBody>
+      </p:sp>
+      <p:sp>
+        <p:nvSpPr>
+          <p:cNvPr id="3" name="TextBox 2"/>
+          <p:cNvSpPr txBox="1"/>
+          <p:nvPr/>
+        </p:nvSpPr>
+        <p:spPr>
+          <a:xfrm>
+            <a:off x="640080" y="1280160"/>
+            <a:ext cx="10881360" cy="5120640"/>
+          </a:xfrm>
+          <a:prstGeom prst="rect">
+            <a:avLst/>
+          </a:prstGeom>
+          <a:noFill/>
+        </p:spPr>
+        <p:txBody>
+          <a:bodyPr wrap="square">
+            <a:spAutoFit/>
+          </a:bodyPr>
+          <a:lstStyle/>
+          <a:p>
+            <a:r>
+              <a:rPr sz="2000" b="1">
+                <a:solidFill>
+                  <a:srgbClr val="222222"/>
+                </a:solidFill>
+                <a:latin typeface="Calibri"/>
+              </a:rPr>
+              <a:t>1. Write a JavaScript function named checkEmail that displays an alert saying Please enter your email if the text box with the id email is empty. [4]</a:t>
+            </a:r>
+          </a:p>
+          <a:p>
+            <a:pPr lvl="1"/>
+            <a:r>
+              <a:rPr sz="1800" i="1">
+                <a:solidFill>
+                  <a:srgbClr val="B76E00"/>
+                </a:solidFill>
+                <a:latin typeface="Calibri"/>
+              </a:rPr>
+              <a:t>Answer: function checkEmail() { var email = document.getElementById("email").value; if (email == "") { alert("Please enter your email"); } } — marks for the function declaration, using document.getElementById("email").value, the comparison with the empty string, and the alert inside the if.</a:t>
+            </a:r>
+          </a:p>
+          <a:p>
+            <a:r>
+              <a:rPr sz="2000" b="1">
+                <a:solidFill>
+                  <a:srgbClr val="222222"/>
+                </a:solidFill>
+                <a:latin typeface="Calibri"/>
+              </a:rPr>
+              <a:t>2. Explain two advantages of validating a form using client-side JavaScript rather than on the server. [4]</a:t>
+            </a:r>
+          </a:p>
+          <a:p>
+            <a:pPr lvl="1"/>
+            <a:r>
+              <a:rPr sz="1800" i="1">
+                <a:solidFill>
+                  <a:srgbClr val="B76E00"/>
+                </a:solidFill>
+                <a:latin typeface="Calibri"/>
+              </a:rPr>
+              <a:t>Answer: The user gets an immediate response (1) because no round trip to the server is needed (1); and server load/bandwidth is reduced (1) because invalid submissions are stopped before they are ever sent (1).</a:t>
+            </a:r>
+          </a:p>
+          <a:p>
+            <a:r>
+              <a:rPr sz="2000" b="1">
+                <a:solidFill>
+                  <a:srgbClr val="222222"/>
+                </a:solidFill>
+                <a:latin typeface="Calibri"/>
+              </a:rPr>
+              <a:t>3. A website checks a user's password when they log in. Explain why this check must be carried out server-side. [3]</a:t>
+            </a:r>
+          </a:p>
+          <a:p>
+            <a:pPr lvl="1"/>
+            <a:r>
+              <a:rPr sz="1800" i="1">
+                <a:solidFill>
+                  <a:srgbClr val="B76E00"/>
+                </a:solidFill>
+                <a:latin typeface="Calibri"/>
+              </a:rPr>
+              <a:t>Answer: Client-side code can be viewed, modified or bypassed by the user (1), so a browser check cannot be trusted for security (1); the stored password data/hashes and the comparison logic must stay hidden on the server, which also holds the accounts database (1).</a:t>
+            </a:r>
+          </a:p>
+          <a:p>
+            <a:r>
+              <a:rPr sz="2000" b="1">
+                <a:solidFill>
+                  <a:srgbClr val="222222"/>
+                </a:solidFill>
+                <a:latin typeface="Calibri"/>
+              </a:rPr>
+              <a:t>4. Describe the difference between an internal and an external stylesheet, and give one advantage of using an external stylesheet. [3]</a:t>
+            </a:r>
+          </a:p>
+          <a:p>
+            <a:pPr lvl="1"/>
+            <a:r>
+              <a:rPr sz="1800" i="1">
+                <a:solidFill>
+                  <a:srgbClr val="B76E00"/>
+                </a:solidFill>
+                <a:latin typeface="Calibri"/>
+              </a:rPr>
+              <a:t>Answer: An internal stylesheet is written in a style tag in the head and applies to that page only (1); an external stylesheet is a separate .css file attached with a link tag (1). Advantage: one file can style every page of the site, so a single change updates the whole site consistently (1).</a:t>
+            </a:r>
+          </a:p>
+        </p:txBody>
+      </p:sp>
+    </p:spTree>
+  </p:cSld>
+  <p:clrMapOvr>
+    <a:masterClrMapping/>
+  </p:clrMapOvr>
+</p:sld>
+</file>
+
+<file path=ppt/slides/slide26.xml><?xml version="1.0" encoding="utf-8"?>
+<p:sld xmlns:a="http://schemas.openxmlformats.org/drawingml/2006/main" xmlns:p="http://schemas.openxmlformats.org/presentationml/2006/main" xmlns:r="http://schemas.openxmlformats.org/officeDocument/2006/relationships">
+  <p:cSld>
+    <p:bg>
+      <p:bgPr>
+        <a:solidFill>
+          <a:srgbClr val="FFFFFF"/>
+        </a:solidFill>
+        <a:effectLst/>
+      </p:bgPr>
+    </p:bg>
+    <p:spTree>
+      <p:nvGrpSpPr>
+        <p:cNvPr id="1" name=""/>
+        <p:cNvGrpSpPr/>
+        <p:nvPr/>
+      </p:nvGrpSpPr>
+      <p:grpSpPr/>
+      <p:sp>
+        <p:nvSpPr>
+          <p:cNvPr id="2" name="TextBox 1"/>
+          <p:cNvSpPr txBox="1"/>
+          <p:nvPr/>
+        </p:nvSpPr>
+        <p:spPr>
+          <a:xfrm>
+            <a:off x="548640" y="274320"/>
+            <a:ext cx="11064240" cy="822960"/>
+          </a:xfrm>
+          <a:prstGeom prst="rect">
+            <a:avLst/>
+          </a:prstGeom>
+          <a:noFill/>
+        </p:spPr>
+        <p:txBody>
+          <a:bodyPr wrap="square">
+            <a:spAutoFit/>
+          </a:bodyPr>
+          <a:lstStyle/>
+          <a:p>
+            <a:r>
+              <a:rPr sz="3000" b="1" i="0">
+                <a:solidFill>
+                  <a:srgbClr val="2B6CB0"/>
+                </a:solidFill>
+                <a:latin typeface="Calibri"/>
+              </a:rPr>
+              <a:t>Common misconceptions</a:t>
+            </a:r>
+          </a:p>
+        </p:txBody>
+      </p:sp>
+      <p:sp>
+        <p:nvSpPr>
+          <p:cNvPr id="3" name="TextBox 2"/>
+          <p:cNvSpPr txBox="1"/>
+          <p:nvPr/>
+        </p:nvSpPr>
+        <p:spPr>
+          <a:xfrm>
+            <a:off x="640080" y="1280160"/>
+            <a:ext cx="10881360" cy="5120640"/>
+          </a:xfrm>
+          <a:prstGeom prst="rect">
+            <a:avLst/>
+          </a:prstGeom>
+          <a:noFill/>
+        </p:spPr>
+        <p:txBody>
+          <a:bodyPr wrap="square">
+            <a:spAutoFit/>
+          </a:bodyPr>
+          <a:lstStyle/>
+          <a:p>
+            <a:pPr/>
+            <a:r>
+              <a:rPr sz="2000" b="0">
+                <a:solidFill>
+                  <a:srgbClr val="222222"/>
+                </a:solidFill>
+                <a:latin typeface="Calibri"/>
+              </a:rPr>
+              <a:t>✗ Students often write colour in CSS because of UK spelling, but the property names are color and background-color — colour is simply ignored by the browser.</a:t>
+            </a:r>
+          </a:p>
+          <a:p>
+            <a:pPr/>
+            <a:r>
+              <a:rPr sz="2000" b="0">
+                <a:solidFill>
+                  <a:srgbClr val="222222"/>
+                </a:solidFill>
+                <a:latin typeface="Calibri"/>
+              </a:rPr>
+              <a:t>✗ Students often treat class and id as interchangeable, but an id must be unique to one element per page (#name), while a class is designed to be reused on many elements (.name).</a:t>
+            </a:r>
+          </a:p>
+          <a:p>
+            <a:pPr/>
+            <a:r>
+              <a:rPr sz="2000" b="0">
+                <a:solidFill>
+                  <a:srgbClr val="222222"/>
+                </a:solidFill>
+                <a:latin typeface="Calibri"/>
+              </a:rPr>
+              <a:t>✗ Students often think client-side validation makes a form secure, but browser code can be viewed, altered or bypassed, so every security-critical check must be repeated server-side.</a:t>
+            </a:r>
+          </a:p>
+          <a:p>
+            <a:pPr/>
+            <a:r>
+              <a:rPr sz="2000" b="0">
+                <a:solidFill>
+                  <a:srgbClr val="222222"/>
+                </a:solidFill>
+                <a:latin typeface="Calibri"/>
+              </a:rPr>
+              <a:t>✗ Students often mix up the attributes: img uses src for the file, while a uses href for the destination — swapping them is a classic exam-code error.</a:t>
+            </a:r>
+          </a:p>
+          <a:p>
+            <a:pPr/>
+            <a:r>
+              <a:rPr sz="2000" b="0">
+                <a:solidFill>
+                  <a:srgbClr val="222222"/>
+                </a:solidFill>
+                <a:latin typeface="Calibri"/>
+              </a:rPr>
+              <a:t>✗ Students often think JavaScript is a cut-down version of Java, but they are unrelated languages; JavaScript is the scripting language browsers run client-side.</a:t>
+            </a:r>
+          </a:p>
+        </p:txBody>
+      </p:sp>
+    </p:spTree>
+  </p:cSld>
+  <p:clrMapOvr>
+    <a:masterClrMapping/>
+  </p:clrMapOvr>
+</p:sld>
+</file>
+
+<file path=ppt/slides/slide27.xml><?xml version="1.0" encoding="utf-8"?>
+<p:sld xmlns:a="http://schemas.openxmlformats.org/drawingml/2006/main" xmlns:p="http://schemas.openxmlformats.org/presentationml/2006/main" xmlns:r="http://schemas.openxmlformats.org/officeDocument/2006/relationships">
+  <p:cSld>
+    <p:bg>
+      <p:bgPr>
+        <a:solidFill>
+          <a:srgbClr val="FFFFFF"/>
+        </a:solidFill>
+        <a:effectLst/>
+      </p:bgPr>
+    </p:bg>
+    <p:spTree>
+      <p:nvGrpSpPr>
+        <p:cNvPr id="1" name=""/>
+        <p:cNvGrpSpPr/>
+        <p:nvPr/>
+      </p:nvGrpSpPr>
+      <p:grpSpPr/>
+      <p:sp>
+        <p:nvSpPr>
+          <p:cNvPr id="2" name="TextBox 1"/>
+          <p:cNvSpPr txBox="1"/>
+          <p:nvPr/>
+        </p:nvSpPr>
+        <p:spPr>
+          <a:xfrm>
+            <a:off x="548640" y="274320"/>
+            <a:ext cx="11064240" cy="822960"/>
+          </a:xfrm>
+          <a:prstGeom prst="rect">
+            <a:avLst/>
+          </a:prstGeom>
+          <a:noFill/>
+        </p:spPr>
+        <p:txBody>
+          <a:bodyPr wrap="square">
+            <a:spAutoFit/>
+          </a:bodyPr>
+          <a:lstStyle/>
+          <a:p>
+            <a:r>
+              <a:rPr sz="3000" b="1" i="0">
+                <a:solidFill>
+                  <a:srgbClr val="2B6CB0"/>
+                </a:solidFill>
+                <a:latin typeface="Calibri"/>
+              </a:rPr>
+              <a:t>How the exam asks this</a:t>
+            </a:r>
+          </a:p>
+        </p:txBody>
+      </p:sp>
+      <p:sp>
+        <p:nvSpPr>
+          <p:cNvPr id="3" name="TextBox 2"/>
+          <p:cNvSpPr txBox="1"/>
+          <p:nvPr/>
+        </p:nvSpPr>
+        <p:spPr>
+          <a:xfrm>
+            <a:off x="640080" y="1280160"/>
+            <a:ext cx="10881360" cy="5120640"/>
+          </a:xfrm>
+          <a:prstGeom prst="rect">
+            <a:avLst/>
+          </a:prstGeom>
+          <a:noFill/>
+        </p:spPr>
+        <p:txBody>
+          <a:bodyPr wrap="square">
+            <a:spAutoFit/>
+          </a:bodyPr>
+          <a:lstStyle/>
+          <a:p>
+            <a:pPr/>
+            <a:r>
+              <a:rPr sz="2000" b="0">
+                <a:solidFill>
+                  <a:srgbClr val="222222"/>
+                </a:solidFill>
+                <a:latin typeface="Calibri"/>
+              </a:rPr>
+              <a:t>Command words: state and write for tags, attributes and CSS rules (1 mark per correct piece of syntax); describe and explain for validation and processing; compare for client-side versus server-side.</a:t>
+            </a:r>
+          </a:p>
+          <a:p>
+            <a:pPr/>
+            <a:r>
+              <a:rPr sz="2000" b="0">
+                <a:solidFill>
+                  <a:srgbClr val="222222"/>
+                </a:solidFill>
+                <a:latin typeface="Calibri"/>
+              </a:rPr>
+              <a:t>Typical tariffs: 2-3 marks to write an HTML tag or CSS rule; 3-4 marks for short JavaScript; 4-6 marks to explain or compare client-side and server-side processing in context.</a:t>
+            </a:r>
+          </a:p>
+          <a:p>
+            <a:pPr/>
+            <a:r>
+              <a:rPr sz="2000" b="0">
+                <a:solidFill>
+                  <a:srgbClr val="222222"/>
+                </a:solidFill>
+                <a:latin typeface="Calibri"/>
+              </a:rPr>
+              <a:t>Example stem: A form on a shopping website is validated using JavaScript in the browser. Explain why the data entered must also be validated on the web server. [3]</a:t>
+            </a:r>
+          </a:p>
+          <a:p>
+            <a:pPr/>
+            <a:r>
+              <a:rPr sz="2000" b="0">
+                <a:solidFill>
+                  <a:srgbClr val="222222"/>
+                </a:solidFill>
+                <a:latin typeface="Calibri"/>
+              </a:rPr>
+              <a:t>Code answers are marked on exact syntax: src versus href, . versus # selectors, matching closing tags and correct nesting all carry marks — sloppy syntax loses them.</a:t>
+            </a:r>
+          </a:p>
+        </p:txBody>
+      </p:sp>
+    </p:spTree>
+  </p:cSld>
+  <p:clrMapOvr>
+    <a:masterClrMapping/>
+  </p:clrMapOvr>
+</p:sld>
+</file>
+
+<file path=ppt/slides/slide28.xml><?xml version="1.0" encoding="utf-8"?>
+<p:sld xmlns:a="http://schemas.openxmlformats.org/drawingml/2006/main" xmlns:p="http://schemas.openxmlformats.org/presentationml/2006/main" xmlns:r="http://schemas.openxmlformats.org/officeDocument/2006/relationships">
+  <p:cSld>
+    <p:bg>
+      <p:bgPr>
+        <a:solidFill>
+          <a:srgbClr val="FFFFFF"/>
+        </a:solidFill>
+        <a:effectLst/>
+      </p:bgPr>
+    </p:bg>
+    <p:spTree>
+      <p:nvGrpSpPr>
+        <p:cNvPr id="1" name=""/>
+        <p:cNvGrpSpPr/>
+        <p:nvPr/>
+      </p:nvGrpSpPr>
+      <p:grpSpPr/>
+      <p:sp>
+        <p:nvSpPr>
+          <p:cNvPr id="2" name="TextBox 1"/>
+          <p:cNvSpPr txBox="1"/>
+          <p:nvPr/>
+        </p:nvSpPr>
+        <p:spPr>
+          <a:xfrm>
+            <a:off x="548640" y="274320"/>
+            <a:ext cx="11064240" cy="822960"/>
+          </a:xfrm>
+          <a:prstGeom prst="rect">
+            <a:avLst/>
+          </a:prstGeom>
+          <a:noFill/>
+        </p:spPr>
+        <p:txBody>
+          <a:bodyPr wrap="square">
+            <a:spAutoFit/>
+          </a:bodyPr>
+          <a:lstStyle/>
+          <a:p>
+            <a:r>
+              <a:rPr sz="3000" b="1" i="0">
+                <a:solidFill>
+                  <a:srgbClr val="2B6CB0"/>
+                </a:solidFill>
+                <a:latin typeface="Calibri"/>
+              </a:rPr>
+              <a:t>Your turn</a:t>
+            </a:r>
+          </a:p>
+        </p:txBody>
+      </p:sp>
+      <p:sp>
+        <p:nvSpPr>
+          <p:cNvPr id="3" name="TextBox 2"/>
+          <p:cNvSpPr txBox="1"/>
+          <p:nvPr/>
+        </p:nvSpPr>
+        <p:spPr>
+          <a:xfrm>
+            <a:off x="640080" y="1280160"/>
+            <a:ext cx="10881360" cy="5120640"/>
+          </a:xfrm>
+          <a:prstGeom prst="rect">
+            <a:avLst/>
+          </a:prstGeom>
+          <a:noFill/>
+        </p:spPr>
+        <p:txBody>
+          <a:bodyPr wrap="square">
+            <a:spAutoFit/>
+          </a:bodyPr>
+          <a:lstStyle/>
+          <a:p>
+            <a:pPr/>
+            <a:r>
+              <a:rPr sz="2400" b="1">
+                <a:solidFill>
+                  <a:srgbClr val="2B6CB0"/>
+                </a:solidFill>
+                <a:latin typeface="Calibri"/>
+              </a:rPr>
+              <a:t>Task</a:t>
+            </a:r>
+          </a:p>
+          <a:p>
+            <a:pPr lvl="1"/>
+            <a:r>
+              <a:rPr sz="2200" b="0">
+                <a:solidFill>
+                  <a:srgbClr val="222222"/>
+                </a:solidFill>
+                <a:latin typeface="Calibri"/>
+              </a:rPr>
+              <a:t>Write, on paper, the complete HTML for a page titled Revision Hub containing: a main heading with the id title, two paragraphs sharing the class note, an image study.png with suitable alternative text, and a link to quiz.html with the text Start quiz. Then write an external stylesheet with three rules: an element selector centring all h1 text, a class selector giving .note a grey background, and an id selector giving #title a navy colour and a border. Annotate each rule with exactly which element(s) it styles and why.</a:t>
+            </a:r>
+          </a:p>
+          <a:p>
+            <a:r>
+              <a:rPr sz="2400" b="1">
+                <a:solidFill>
+                  <a:srgbClr val="B76E00"/>
+                </a:solidFill>
+                <a:latin typeface="Calibri"/>
+              </a:rPr>
+              <a:t>Challenge / stretch</a:t>
+            </a:r>
+          </a:p>
+          <a:p>
+            <a:pPr lvl="1"/>
+            <a:r>
+              <a:rPr sz="2200" b="0">
+                <a:solidFill>
+                  <a:srgbClr val="222222"/>
+                </a:solidFill>
+                <a:latin typeface="Calibri"/>
+              </a:rPr>
+              <a:t>Extend your page with a form containing a text input with the id score and a submit button, then write a JavaScript function that rejects the submission with an alert if the score is empty or not between 0 and 100. Trace your function for the inputs 150 and 72, then write two sentences explaining why a quiz website could not trust this check alone and what it must do instead.</a:t>
+            </a:r>
+          </a:p>
+        </p:txBody>
+      </p:sp>
+    </p:spTree>
+  </p:cSld>
+  <p:clrMapOvr>
+    <a:masterClrMapping/>
+  </p:clrMapOvr>
+</p:sld>
+</file>
+
+<file path=ppt/slides/slide29.xml><?xml version="1.0" encoding="utf-8"?>
+<p:sld xmlns:a="http://schemas.openxmlformats.org/drawingml/2006/main" xmlns:p="http://schemas.openxmlformats.org/presentationml/2006/main" xmlns:r="http://schemas.openxmlformats.org/officeDocument/2006/relationships">
+  <p:cSld>
+    <p:bg>
+      <p:bgPr>
+        <a:solidFill>
+          <a:srgbClr val="FFFFFF"/>
+        </a:solidFill>
+        <a:effectLst/>
+      </p:bgPr>
+    </p:bg>
+    <p:spTree>
+      <p:nvGrpSpPr>
+        <p:cNvPr id="1" name=""/>
+        <p:cNvGrpSpPr/>
+        <p:nvPr/>
+      </p:nvGrpSpPr>
+      <p:grpSpPr/>
+      <p:sp>
+        <p:nvSpPr>
+          <p:cNvPr id="2" name="TextBox 1"/>
+          <p:cNvSpPr txBox="1"/>
+          <p:nvPr/>
+        </p:nvSpPr>
+        <p:spPr>
+          <a:xfrm>
+            <a:off x="548640" y="274320"/>
+            <a:ext cx="11064240" cy="822960"/>
+          </a:xfrm>
+          <a:prstGeom prst="rect">
+            <a:avLst/>
+          </a:prstGeom>
+          <a:noFill/>
+        </p:spPr>
+        <p:txBody>
+          <a:bodyPr wrap="square">
+            <a:spAutoFit/>
+          </a:bodyPr>
+          <a:lstStyle/>
+          <a:p>
+            <a:r>
+              <a:rPr sz="3000" b="1" i="0">
+                <a:solidFill>
+                  <a:srgbClr val="2B6CB0"/>
+                </a:solidFill>
+                <a:latin typeface="Calibri"/>
+              </a:rPr>
+              <a:t>Exit ticket</a:t>
+            </a:r>
+          </a:p>
+        </p:txBody>
+      </p:sp>
+      <p:sp>
+        <p:nvSpPr>
+          <p:cNvPr id="3" name="TextBox 2"/>
+          <p:cNvSpPr txBox="1"/>
+          <p:nvPr/>
+        </p:nvSpPr>
+        <p:spPr>
+          <a:xfrm>
+            <a:off x="640080" y="1280160"/>
+            <a:ext cx="10881360" cy="5120640"/>
+          </a:xfrm>
+          <a:prstGeom prst="rect">
+            <a:avLst/>
+          </a:prstGeom>
+          <a:noFill/>
+        </p:spPr>
+        <p:txBody>
+          <a:bodyPr wrap="square">
+            <a:spAutoFit/>
+          </a:bodyPr>
+          <a:lstStyle/>
+          <a:p>
+            <a:r>
+              <a:rPr sz="2200" b="1">
+                <a:solidFill>
+                  <a:srgbClr val="222222"/>
+                </a:solidFill>
+                <a:latin typeface="Calibri"/>
+              </a:rPr>
+              <a:t>1. Which technology provides structure, which provides style, and which provides behaviour?</a:t>
+            </a:r>
+          </a:p>
+          <a:p>
+            <a:r>
+              <a:rPr sz="2200" b="1">
+                <a:solidFill>
+                  <a:srgbClr val="222222"/>
+                </a:solidFill>
+                <a:latin typeface="Calibri"/>
+              </a:rPr>
+              <a:t>2. In CSS, what is the difference between the selectors .menu and #menu?</a:t>
+            </a:r>
+          </a:p>
+          <a:p>
+            <a:r>
+              <a:rPr sz="2200" b="1">
+                <a:solidFill>
+                  <a:srgbClr val="222222"/>
+                </a:solidFill>
+                <a:latin typeface="Calibri"/>
+              </a:rPr>
+              <a:t>3. Give one reason a login check must run server-side even if the form is also checked in the browser.</a:t>
             </a:r>
           </a:p>
         </p:txBody>
@@ -3972,7 +6624,7 @@
                 </a:solidFill>
                 <a:latin typeface="Calibri"/>
               </a:rPr>
-              <a:t>1. What is the role of HTML, CSS and JavaScript in a web page?</a:t>
+              <a:t>1. 1.3.3: Give two differences between a LAN and a WAN.</a:t>
             </a:r>
           </a:p>
           <a:p>
@@ -3983,7 +6635,7 @@
                 </a:solidFill>
                 <a:latin typeface="Calibri"/>
               </a:rPr>
-              <a:t>2. In PageRank, what does a link from one page to another represent?</a:t>
+              <a:t>2. 1.3.3: Name the four layers of the TCP/IP stack in order, from the layer nearest the user downwards.</a:t>
             </a:r>
           </a:p>
           <a:p>
@@ -3994,7 +6646,7 @@
                 </a:solidFill>
                 <a:latin typeface="Calibri"/>
               </a:rPr>
-              <a:t>3. Why must security-critical validation also run server-side?</a:t>
+              <a:t>3. 1.3.3: What does DNS do when you type www.ocr.org.uk into a browser?</a:t>
             </a:r>
           </a:p>
           <a:p>
@@ -4005,7 +6657,7 @@
                 </a:solidFill>
                 <a:latin typeface="Calibri"/>
               </a:rPr>
-              <a:t>4. Interleaving (1.3.3): When a JavaScript form submits to a web server, which application-layer protocols typically carry the request?</a:t>
+              <a:t>4. 1.3.3: State two differences between packet switching and circuit switching.</a:t>
             </a:r>
           </a:p>
           <a:p>
@@ -4016,7 +6668,159 @@
                 </a:solidFill>
                 <a:latin typeface="Calibri"/>
               </a:rPr>
-              <a:t>5. Interleaving (1.3.1): Why is the client-side source of a web page not a safe place to store a secret key?</a:t>
+              <a:t>5. 1.3.3: In a client-server network, what is the role of the server, and what is the main structural difference in peer-to-peer?</a:t>
+            </a:r>
+          </a:p>
+        </p:txBody>
+      </p:sp>
+    </p:spTree>
+  </p:cSld>
+  <p:clrMapOvr>
+    <a:masterClrMapping/>
+  </p:clrMapOvr>
+</p:sld>
+</file>
+
+<file path=ppt/slides/slide30.xml><?xml version="1.0" encoding="utf-8"?>
+<p:sld xmlns:a="http://schemas.openxmlformats.org/drawingml/2006/main" xmlns:p="http://schemas.openxmlformats.org/presentationml/2006/main" xmlns:r="http://schemas.openxmlformats.org/officeDocument/2006/relationships">
+  <p:cSld>
+    <p:bg>
+      <p:bgPr>
+        <a:solidFill>
+          <a:srgbClr val="FFFFFF"/>
+        </a:solidFill>
+        <a:effectLst/>
+      </p:bgPr>
+    </p:bg>
+    <p:spTree>
+      <p:nvGrpSpPr>
+        <p:cNvPr id="1" name=""/>
+        <p:cNvGrpSpPr/>
+        <p:nvPr/>
+      </p:nvGrpSpPr>
+      <p:grpSpPr/>
+      <p:sp>
+        <p:nvSpPr>
+          <p:cNvPr id="2" name="TextBox 1"/>
+          <p:cNvSpPr txBox="1"/>
+          <p:nvPr/>
+        </p:nvSpPr>
+        <p:spPr>
+          <a:xfrm>
+            <a:off x="548640" y="274320"/>
+            <a:ext cx="11064240" cy="822960"/>
+          </a:xfrm>
+          <a:prstGeom prst="rect">
+            <a:avLst/>
+          </a:prstGeom>
+          <a:noFill/>
+        </p:spPr>
+        <p:txBody>
+          <a:bodyPr wrap="square">
+            <a:spAutoFit/>
+          </a:bodyPr>
+          <a:lstStyle/>
+          <a:p>
+            <a:r>
+              <a:rPr sz="3000" b="1" i="0">
+                <a:solidFill>
+                  <a:srgbClr val="2B6CB0"/>
+                </a:solidFill>
+                <a:latin typeface="Calibri"/>
+              </a:rPr>
+              <a:t>Exit ticket — answers</a:t>
+            </a:r>
+          </a:p>
+        </p:txBody>
+      </p:sp>
+      <p:sp>
+        <p:nvSpPr>
+          <p:cNvPr id="3" name="TextBox 2"/>
+          <p:cNvSpPr txBox="1"/>
+          <p:nvPr/>
+        </p:nvSpPr>
+        <p:spPr>
+          <a:xfrm>
+            <a:off x="640080" y="1280160"/>
+            <a:ext cx="10881360" cy="5120640"/>
+          </a:xfrm>
+          <a:prstGeom prst="rect">
+            <a:avLst/>
+          </a:prstGeom>
+          <a:noFill/>
+        </p:spPr>
+        <p:txBody>
+          <a:bodyPr wrap="square">
+            <a:spAutoFit/>
+          </a:bodyPr>
+          <a:lstStyle/>
+          <a:p>
+            <a:r>
+              <a:rPr sz="2200" b="1">
+                <a:solidFill>
+                  <a:srgbClr val="222222"/>
+                </a:solidFill>
+                <a:latin typeface="Calibri"/>
+              </a:rPr>
+              <a:t>1. Which technology provides structure, which provides style, and which provides behaviour?</a:t>
+            </a:r>
+          </a:p>
+          <a:p>
+            <a:pPr lvl="1"/>
+            <a:r>
+              <a:rPr sz="1800" i="1">
+                <a:solidFill>
+                  <a:srgbClr val="B76E00"/>
+                </a:solidFill>
+                <a:latin typeface="Calibri"/>
+              </a:rPr>
+              <a:t>Answer: HTML provides structure and content, CSS provides style/presentation, JavaScript provides behaviour/interactivity.</a:t>
+            </a:r>
+          </a:p>
+          <a:p>
+            <a:r>
+              <a:rPr sz="2200" b="1">
+                <a:solidFill>
+                  <a:srgbClr val="222222"/>
+                </a:solidFill>
+                <a:latin typeface="Calibri"/>
+              </a:rPr>
+              <a:t>2. In CSS, what is the difference between the selectors .menu and #menu?</a:t>
+            </a:r>
+          </a:p>
+          <a:p>
+            <a:pPr lvl="1"/>
+            <a:r>
+              <a:rPr sz="1800" i="1">
+                <a:solidFill>
+                  <a:srgbClr val="B76E00"/>
+                </a:solidFill>
+                <a:latin typeface="Calibri"/>
+              </a:rPr>
+              <a:t>Answer: .menu targets every element with class="menu" (reusable on many elements); #menu targets the single element with id="menu" (an id is unique per page).</a:t>
+            </a:r>
+          </a:p>
+          <a:p>
+            <a:r>
+              <a:rPr sz="2200" b="1">
+                <a:solidFill>
+                  <a:srgbClr val="222222"/>
+                </a:solidFill>
+                <a:latin typeface="Calibri"/>
+              </a:rPr>
+              <a:t>3. Give one reason a login check must run server-side even if the form is also checked in the browser.</a:t>
+            </a:r>
+          </a:p>
+          <a:p>
+            <a:pPr lvl="1"/>
+            <a:r>
+              <a:rPr sz="1800" i="1">
+                <a:solidFill>
+                  <a:srgbClr val="B76E00"/>
+                </a:solidFill>
+                <a:latin typeface="Calibri"/>
+              </a:rPr>
+              <a:t>Answer: Client-side code can be viewed and bypassed, so it is not secure; the stored password data and comparison must stay hidden on the server.</a:t>
             </a:r>
           </a:p>
         </p:txBody>
@@ -4110,7 +6914,7 @@
                 </a:solidFill>
                 <a:latin typeface="Calibri"/>
               </a:rPr>
-              <a:t>1. What is the role of HTML, CSS and JavaScript in a web page?</a:t>
+              <a:t>1. 1.3.3: Give two differences between a LAN and a WAN.</a:t>
             </a:r>
           </a:p>
           <a:p>
@@ -4122,7 +6926,7 @@
                 </a:solidFill>
                 <a:latin typeface="Calibri"/>
               </a:rPr>
-              <a:t>Answer: HTML defines structure and content, CSS defines presentation/style, and JavaScript provides interactivity/behaviour.</a:t>
+              <a:t>Answer: A LAN covers a small geographical area (one site) and is usually owned/maintained by one organisation; a WAN covers a large geographical area and uses third-party communication infrastructure (e.g. leased lines). The internet is the largest WAN.</a:t>
             </a:r>
           </a:p>
           <a:p>
@@ -4133,7 +6937,7 @@
                 </a:solidFill>
                 <a:latin typeface="Calibri"/>
               </a:rPr>
-              <a:t>2. In PageRank, what does a link from one page to another represent?</a:t>
+              <a:t>2. 1.3.3: Name the four layers of the TCP/IP stack in order, from the layer nearest the user downwards.</a:t>
             </a:r>
           </a:p>
           <a:p>
@@ -4145,7 +6949,7 @@
                 </a:solidFill>
                 <a:latin typeface="Calibri"/>
               </a:rPr>
-              <a:t>Answer: A 'vote' for the linked page's importance; votes from high-ranking pages are worth more.</a:t>
+              <a:t>Answer: Application, Transport, Network (Internet), Link (Data link). Data passes down the stack on sending, each layer adding a header, and back up on receipt.</a:t>
             </a:r>
           </a:p>
           <a:p>
@@ -4156,7 +6960,7 @@
                 </a:solidFill>
                 <a:latin typeface="Calibri"/>
               </a:rPr>
-              <a:t>3. Why must security-critical validation also run server-side?</a:t>
+              <a:t>3. 1.3.3: What does DNS do when you type www.ocr.org.uk into a browser?</a:t>
             </a:r>
           </a:p>
           <a:p>
@@ -4168,7 +6972,7 @@
                 </a:solidFill>
                 <a:latin typeface="Calibri"/>
               </a:rPr>
-              <a:t>Answer: Client-side checks can be viewed and bypassed by the user, so they are not secure on their own.</a:t>
+              <a:t>Answer: The Domain Name System translates the human-readable domain name into the IP address of the server, querying resolver/root/TLD/authoritative servers as needed and caching the result.</a:t>
             </a:r>
           </a:p>
           <a:p>
@@ -4179,7 +6983,7 @@
                 </a:solidFill>
                 <a:latin typeface="Calibri"/>
               </a:rPr>
-              <a:t>4. Interleaving (1.3.3): When a JavaScript form submits to a web server, which application-layer protocols typically carry the request?</a:t>
+              <a:t>4. 1.3.3: State two differences between packet switching and circuit switching.</a:t>
             </a:r>
           </a:p>
           <a:p>
@@ -4191,7 +6995,7 @@
                 </a:solidFill>
                 <a:latin typeface="Calibri"/>
               </a:rPr>
-              <a:t>Answer: HTTP, or HTTPS when the connection is encrypted.</a:t>
+              <a:t>Answer: Packet switching splits data into packets that are routed independently and may take different routes, then reassembled; circuit switching sets up one dedicated path for the whole communication, reserving bandwidth even when idle. The internet uses packet switching.</a:t>
             </a:r>
           </a:p>
           <a:p>
@@ -4202,7 +7006,7 @@
                 </a:solidFill>
                 <a:latin typeface="Calibri"/>
               </a:rPr>
-              <a:t>5. Interleaving (1.3.1): Why is the client-side source of a web page not a safe place to store a secret key?</a:t>
+              <a:t>5. 1.3.3: In a client-server network, what is the role of the server, and what is the main structural difference in peer-to-peer?</a:t>
             </a:r>
           </a:p>
           <a:p>
@@ -4214,7 +7018,7 @@
                 </a:solidFill>
                 <a:latin typeface="Calibri"/>
               </a:rPr>
-              <a:t>Answer: Client-side code can be viewed in the browser, so any embedded key could be read; secrets must stay server-side, and sensitive data should be hashed or encrypted.</a:t>
+              <a:t>Answer: The server provides resources/services to clients that request them, giving central control and backup; in peer-to-peer all devices have equal status and each can act as both client and server.</a:t>
             </a:r>
           </a:p>
         </p:txBody>
@@ -4318,7 +7122,7 @@
                 </a:solidFill>
                 <a:latin typeface="Calibri"/>
               </a:rPr>
-              <a:t> — HyperText Markup Language: defines the structure and content of a web page.</a:t>
+              <a:t> — HyperText Markup Language: defines the structure and content of a web page using tags such as h1, p, img and a.</a:t>
             </a:r>
           </a:p>
           <a:p>
@@ -4338,7 +7142,7 @@
                 </a:solidFill>
                 <a:latin typeface="Calibri"/>
               </a:rPr>
-              <a:t> — Cascading Style Sheets: defines presentation and style such as colour, font and layout.</a:t>
+              <a:t> — Cascading Style Sheets: defines presentation and style such as colour, font, borders and layout, kept separate from structure.</a:t>
             </a:r>
           </a:p>
           <a:p>
@@ -4358,7 +7162,7 @@
                 </a:solidFill>
                 <a:latin typeface="Calibri"/>
               </a:rPr>
-              <a:t> — A language providing client-side interactivity and behaviour such as events, validation and dynamic updates.</a:t>
+              <a:t> — A scripting language giving client-side interactivity and behaviour: responding to events, validating forms and updating content dynamically.</a:t>
             </a:r>
           </a:p>
           <a:p>
@@ -4369,7 +7173,7 @@
                 </a:solidFill>
                 <a:latin typeface="Calibri"/>
               </a:rPr>
-              <a:t>CSS selector</a:t>
+              <a:t>Tag and attribute</a:t>
             </a:r>
             <a:r>
               <a:rPr sz="1800">
@@ -4378,7 +7182,7 @@
                 </a:solidFill>
                 <a:latin typeface="Calibri"/>
               </a:rPr>
-              <a:t> — Targets elements to style: a bare name selects by tag, '.' selects by class, '#' selects by id.</a:t>
+              <a:t> — A tag marks up content (e.g. img); an attribute inside the opening tag gives extra detail (e.g. src, alt, href, class, id).</a:t>
             </a:r>
           </a:p>
           <a:p>
@@ -4389,7 +7193,7 @@
                 </a:solidFill>
                 <a:latin typeface="Calibri"/>
               </a:rPr>
-              <a:t>Web crawler</a:t>
+              <a:t>Selector</a:t>
             </a:r>
             <a:r>
               <a:rPr sz="1800">
@@ -4398,7 +7202,7 @@
                 </a:solidFill>
                 <a:latin typeface="Calibri"/>
               </a:rPr>
-              <a:t> — A spider that follows links and reads pages so the search engine can build its index.</a:t>
+              <a:t> — The part of a CSS rule that says which elements to style: a bare tag name, a .class or an #id.</a:t>
             </a:r>
           </a:p>
           <a:p>
@@ -4409,7 +7213,7 @@
                 </a:solidFill>
                 <a:latin typeface="Calibri"/>
               </a:rPr>
-              <a:t>Index</a:t>
+              <a:t>Class</a:t>
             </a:r>
             <a:r>
               <a:rPr sz="1800">
@@ -4418,7 +7222,7 @@
                 </a:solidFill>
                 <a:latin typeface="Calibri"/>
               </a:rPr>
-              <a:t> — A mapping of keywords to the pages they appear on, allowing fast retrieval and ranking by relevance.</a:t>
+              <a:t> — A reusable label attached with class="name" in HTML and targeted with .name in CSS; many elements may share one class.</a:t>
             </a:r>
           </a:p>
           <a:p>
@@ -4429,7 +7233,7 @@
                 </a:solidFill>
                 <a:latin typeface="Calibri"/>
               </a:rPr>
-              <a:t>PageRank</a:t>
+              <a:t>Identifier (id)</a:t>
             </a:r>
             <a:r>
               <a:rPr sz="1800">
@@ -4438,7 +7242,7 @@
                 </a:solidFill>
                 <a:latin typeface="Calibri"/>
               </a:rPr>
-              <a:t> — An algorithm that ranks pages by importance based on the number and rank of incoming links.</a:t>
+              <a:t> — A unique label attached with id="name" and targeted with #name in CSS; each id must appear only once per page.</a:t>
             </a:r>
           </a:p>
           <a:p>
@@ -4449,7 +7253,7 @@
                 </a:solidFill>
                 <a:latin typeface="Calibri"/>
               </a:rPr>
-              <a:t>Damping factor</a:t>
+              <a:t>Client-side processing</a:t>
             </a:r>
             <a:r>
               <a:rPr sz="1800">
@@ -4458,7 +7262,27 @@
                 </a:solidFill>
                 <a:latin typeface="Calibri"/>
               </a:rPr>
-              <a:t> — A value (~0.85) modelling the probability a random surfer keeps following links, ensuring PageRank converges.</a:t>
+              <a:t> — Code that runs in the user's browser: fast and reduces server load, but can be viewed and bypassed, so it is not secure.</a:t>
+            </a:r>
+          </a:p>
+          <a:p>
+            <a:r>
+              <a:rPr b="1" sz="2000">
+                <a:solidFill>
+                  <a:srgbClr val="1A365D"/>
+                </a:solidFill>
+                <a:latin typeface="Calibri"/>
+              </a:rPr>
+              <a:t>Server-side processing</a:t>
+            </a:r>
+            <a:r>
+              <a:rPr sz="1800">
+                <a:solidFill>
+                  <a:srgbClr val="222222"/>
+                </a:solidFill>
+                <a:latin typeface="Calibri"/>
+              </a:rPr>
+              <a:t> — Code that runs on the web server: secure, hidden and able to use server databases, but slower and adds server load.</a:t>
             </a:r>
           </a:p>
         </p:txBody>
@@ -4518,7 +7342,7 @@
                 </a:solidFill>
                 <a:latin typeface="Calibri"/>
               </a:rPr>
-              <a:t>HTML, CSS and JavaScript</a:t>
+              <a:t>How the web works: request and response</a:t>
             </a:r>
           </a:p>
         </p:txBody>
@@ -4547,49 +7371,61 @@
           <a:p>
             <a:pPr/>
             <a:r>
-              <a:rPr sz="2200" b="0">
-                <a:solidFill>
-                  <a:srgbClr val="222222"/>
-                </a:solidFill>
-                <a:latin typeface="Calibri"/>
-              </a:rPr>
-              <a:t>HTML defines the structure and content: headings, paragraphs, links and images.</a:t>
+              <a:rPr sz="2000" b="0">
+                <a:solidFill>
+                  <a:srgbClr val="222222"/>
+                </a:solidFill>
+                <a:latin typeface="Calibri"/>
+              </a:rPr>
+              <a:t>The browser (client) sends an HTTP or HTTPS request for a page to a web server.</a:t>
             </a:r>
           </a:p>
           <a:p>
             <a:pPr/>
             <a:r>
-              <a:rPr sz="2200" b="0">
-                <a:solidFill>
-                  <a:srgbClr val="222222"/>
-                </a:solidFill>
-                <a:latin typeface="Calibri"/>
-              </a:rPr>
-              <a:t>CSS defines presentation and style: colour, font and layout.</a:t>
+              <a:rPr sz="2000" b="0">
+                <a:solidFill>
+                  <a:srgbClr val="222222"/>
+                </a:solidFill>
+                <a:latin typeface="Calibri"/>
+              </a:rPr>
+              <a:t>The server responds with HTML; the browser renders it, fetching any linked CSS, JavaScript and images.</a:t>
             </a:r>
           </a:p>
           <a:p>
             <a:pPr/>
             <a:r>
-              <a:rPr sz="2200" b="0">
-                <a:solidFill>
-                  <a:srgbClr val="222222"/>
-                </a:solidFill>
-                <a:latin typeface="Calibri"/>
-              </a:rPr>
-              <a:t>CSS selectors target elements: a bare name by tag, '.class' by class and '#id' by id.</a:t>
+              <a:rPr sz="2000" b="0">
+                <a:solidFill>
+                  <a:srgbClr val="222222"/>
+                </a:solidFill>
+                <a:latin typeface="Calibri"/>
+              </a:rPr>
+              <a:t>HTML defines structure and content; CSS defines presentation and style; JavaScript defines behaviour and interactivity.</a:t>
             </a:r>
           </a:p>
           <a:p>
             <a:pPr/>
             <a:r>
-              <a:rPr sz="2200" b="0">
-                <a:solidFill>
-                  <a:srgbClr val="222222"/>
-                </a:solidFill>
-                <a:latin typeface="Calibri"/>
-              </a:rPr>
-              <a:t>JavaScript provides interactivity and behaviour, usually client-side: events, validation and dynamic updates.</a:t>
+              <a:rPr sz="2000" b="0">
+                <a:solidFill>
+                  <a:srgbClr val="222222"/>
+                </a:solidFill>
+                <a:latin typeface="Calibri"/>
+              </a:rPr>
+              <a:t>Keeping the three separate makes sites maintainable: restyle a whole site without touching structure or behaviour.</a:t>
+            </a:r>
+          </a:p>
+          <a:p>
+            <a:pPr/>
+            <a:r>
+              <a:rPr sz="1800" b="1">
+                <a:solidFill>
+                  <a:srgbClr val="B76E00"/>
+                </a:solidFill>
+                <a:latin typeface="Calibri"/>
+              </a:rPr>
+              <a:t>Search engines, indexing and PageRank use these same pages — that is next lesson (part 2).</a:t>
             </a:r>
           </a:p>
         </p:txBody>
@@ -4649,7 +7485,7 @@
                 </a:solidFill>
                 <a:latin typeface="Calibri"/>
               </a:rPr>
-              <a:t>Search engine indexing</a:t>
+              <a:t>HTML page structure and nesting</a:t>
             </a:r>
           </a:p>
         </p:txBody>
@@ -4678,49 +7514,145 @@
           <a:p>
             <a:pPr/>
             <a:r>
-              <a:rPr sz="2200" b="0">
-                <a:solidFill>
-                  <a:srgbClr val="222222"/>
-                </a:solidFill>
-                <a:latin typeface="Calibri"/>
-              </a:rPr>
-              <a:t>A web crawler/spider follows links and reads/visits pages across the web.</a:t>
+              <a:rPr sz="2000" b="0">
+                <a:solidFill>
+                  <a:srgbClr val="222222"/>
+                </a:solidFill>
+                <a:latin typeface="Calibri"/>
+              </a:rPr>
+              <a:t>A page nests inside html: the head holds information about the page, the body holds visible content.</a:t>
             </a:r>
           </a:p>
           <a:p>
             <a:pPr/>
             <a:r>
-              <a:rPr sz="2200" b="0">
-                <a:solidFill>
-                  <a:srgbClr val="222222"/>
-                </a:solidFill>
-                <a:latin typeface="Calibri"/>
-              </a:rPr>
-              <a:t>The engine builds an index mapping keywords to the pages they appear on for fast retrieval.</a:t>
+              <a:rPr sz="2000" b="0">
+                <a:solidFill>
+                  <a:srgbClr val="222222"/>
+                </a:solidFill>
+                <a:latin typeface="Calibri"/>
+              </a:rPr>
+              <a:t>title sits inside head and names the browser tab; it does not appear in the page itself.</a:t>
             </a:r>
           </a:p>
           <a:p>
             <a:pPr/>
             <a:r>
-              <a:rPr sz="2200" b="0">
-                <a:solidFill>
-                  <a:srgbClr val="222222"/>
-                </a:solidFill>
-                <a:latin typeface="Calibri"/>
-              </a:rPr>
-              <a:t>Results are then ranked by relevance to the search query.</a:t>
-            </a:r>
-          </a:p>
-          <a:p>
-            <a:pPr/>
-            <a:r>
-              <a:rPr sz="2200" b="0">
-                <a:solidFill>
-                  <a:srgbClr val="222222"/>
-                </a:solidFill>
-                <a:latin typeface="Calibri"/>
-              </a:rPr>
-              <a:t>Indexing makes searching fast because pages are pre-processed rather than searched live.</a:t>
+              <a:rPr sz="2000" b="0">
+                <a:solidFill>
+                  <a:srgbClr val="222222"/>
+                </a:solidFill>
+                <a:latin typeface="Calibri"/>
+              </a:rPr>
+              <a:t>Most tags come in opening/closing pairs and must nest correctly: always close the inner tag first.</a:t>
+            </a:r>
+          </a:p>
+          <a:p>
+            <a:pPr lvl="1"/>
+            <a:r>
+              <a:rPr sz="1600" b="0">
+                <a:solidFill>
+                  <a:srgbClr val="1A365D"/>
+                </a:solidFill>
+                <a:latin typeface="Consolas"/>
+              </a:rPr>
+              <a:t>&lt;html&gt;</a:t>
+            </a:r>
+          </a:p>
+          <a:p>
+            <a:pPr lvl="1"/>
+            <a:r>
+              <a:rPr sz="1600" b="0">
+                <a:solidFill>
+                  <a:srgbClr val="1A365D"/>
+                </a:solidFill>
+                <a:latin typeface="Consolas"/>
+              </a:rPr>
+              <a:t>&lt;head&gt;</a:t>
+            </a:r>
+          </a:p>
+          <a:p>
+            <a:pPr lvl="1"/>
+            <a:r>
+              <a:rPr sz="1600" b="0">
+                <a:solidFill>
+                  <a:srgbClr val="1A365D"/>
+                </a:solidFill>
+                <a:latin typeface="Consolas"/>
+              </a:rPr>
+              <a:t>  &lt;title&gt;My First Page&lt;/title&gt;</a:t>
+            </a:r>
+          </a:p>
+          <a:p>
+            <a:pPr lvl="1"/>
+            <a:r>
+              <a:rPr sz="1600" b="0">
+                <a:solidFill>
+                  <a:srgbClr val="1A365D"/>
+                </a:solidFill>
+                <a:latin typeface="Consolas"/>
+              </a:rPr>
+              <a:t>&lt;/head&gt;</a:t>
+            </a:r>
+          </a:p>
+          <a:p>
+            <a:pPr lvl="1"/>
+            <a:r>
+              <a:rPr sz="1600" b="0">
+                <a:solidFill>
+                  <a:srgbClr val="1A365D"/>
+                </a:solidFill>
+                <a:latin typeface="Consolas"/>
+              </a:rPr>
+              <a:t>&lt;body&gt;</a:t>
+            </a:r>
+          </a:p>
+          <a:p>
+            <a:pPr lvl="1"/>
+            <a:r>
+              <a:rPr sz="1600" b="0">
+                <a:solidFill>
+                  <a:srgbClr val="1A365D"/>
+                </a:solidFill>
+                <a:latin typeface="Consolas"/>
+              </a:rPr>
+              <a:t>  &lt;h1&gt;Hello&lt;/h1&gt;</a:t>
+            </a:r>
+          </a:p>
+          <a:p>
+            <a:pPr lvl="1"/>
+            <a:r>
+              <a:rPr sz="1600" b="0">
+                <a:solidFill>
+                  <a:srgbClr val="1A365D"/>
+                </a:solidFill>
+                <a:latin typeface="Consolas"/>
+              </a:rPr>
+              <a:t>  &lt;p&gt;Welcome to my site.&lt;/p&gt;</a:t>
+            </a:r>
+          </a:p>
+          <a:p>
+            <a:pPr lvl="1"/>
+            <a:r>
+              <a:rPr sz="1600" b="0">
+                <a:solidFill>
+                  <a:srgbClr val="1A365D"/>
+                </a:solidFill>
+                <a:latin typeface="Consolas"/>
+              </a:rPr>
+              <a:t>&lt;/body&gt;</a:t>
+            </a:r>
+          </a:p>
+          <a:p>
+            <a:pPr lvl="1"/>
+            <a:r>
+              <a:rPr sz="1600" b="0">
+                <a:solidFill>
+                  <a:srgbClr val="1A365D"/>
+                </a:solidFill>
+                <a:latin typeface="Consolas"/>
+              </a:rPr>
+              <a:t>&lt;/html&gt;</a:t>
             </a:r>
           </a:p>
         </p:txBody>
@@ -4780,7 +7712,7 @@
                 </a:solidFill>
                 <a:latin typeface="Calibri"/>
               </a:rPr>
-              <a:t>PageRank algorithm</a:t>
+              <a:t>Content tags: headings, paragraphs, images, links, div</a:t>
             </a:r>
           </a:p>
         </p:txBody>
@@ -4809,49 +7741,109 @@
           <a:p>
             <a:pPr/>
             <a:r>
-              <a:rPr sz="2200" b="0">
-                <a:solidFill>
-                  <a:srgbClr val="222222"/>
-                </a:solidFill>
-                <a:latin typeface="Calibri"/>
-              </a:rPr>
-              <a:t>PageRank ranks pages by importance derived from incoming links; each link is a 'vote'.</a:t>
+              <a:rPr sz="2000" b="0">
+                <a:solidFill>
+                  <a:srgbClr val="222222"/>
+                </a:solidFill>
+                <a:latin typeface="Calibri"/>
+              </a:rPr>
+              <a:t>h1 to h6 are headings from largest to smallest; p marks a paragraph of text.</a:t>
             </a:r>
           </a:p>
           <a:p>
             <a:pPr/>
             <a:r>
-              <a:rPr sz="2200" b="0">
-                <a:solidFill>
-                  <a:srgbClr val="222222"/>
-                </a:solidFill>
-                <a:latin typeface="Calibri"/>
-              </a:rPr>
-              <a:t>Links from high-ranking pages are worth more, and a page divides its rank across its outgoing links.</a:t>
+              <a:rPr sz="2000" b="0">
+                <a:solidFill>
+                  <a:srgbClr val="222222"/>
+                </a:solidFill>
+                <a:latin typeface="Calibri"/>
+              </a:rPr>
+              <a:t>img has no closing tag: src names the image file, alt gives text shown if it cannot load.</a:t>
             </a:r>
           </a:p>
           <a:p>
             <a:pPr/>
             <a:r>
-              <a:rPr sz="2200" b="0">
-                <a:solidFill>
-                  <a:srgbClr val="222222"/>
-                </a:solidFill>
-                <a:latin typeface="Calibri"/>
-              </a:rPr>
-              <a:t>The damping factor (~0.85) models a random surfer who keeps following links rather than jumping randomly, preventing unrealistic or looping ranks.</a:t>
+              <a:rPr sz="2000" b="0">
+                <a:solidFill>
+                  <a:srgbClr val="222222"/>
+                </a:solidFill>
+                <a:latin typeface="Calibri"/>
+              </a:rPr>
+              <a:t>a makes a hyperlink: href gives the destination; the text between the tags is what users click.</a:t>
             </a:r>
           </a:p>
           <a:p>
             <a:pPr/>
             <a:r>
-              <a:rPr sz="2200" b="0">
-                <a:solidFill>
-                  <a:srgbClr val="222222"/>
-                </a:solidFill>
-                <a:latin typeface="Calibri"/>
-              </a:rPr>
-              <a:t>It is calculated iteratively, recalculating ranks using the latest values until they converge (stop changing significantly).</a:t>
+              <a:rPr sz="2000" b="0">
+                <a:solidFill>
+                  <a:srgbClr val="222222"/>
+                </a:solidFill>
+                <a:latin typeface="Calibri"/>
+              </a:rPr>
+              <a:t>div groups a block of elements so it can be styled or scripted as one unit.</a:t>
+            </a:r>
+          </a:p>
+          <a:p>
+            <a:pPr lvl="1"/>
+            <a:r>
+              <a:rPr sz="1600" b="0">
+                <a:solidFill>
+                  <a:srgbClr val="1A365D"/>
+                </a:solidFill>
+                <a:latin typeface="Consolas"/>
+              </a:rPr>
+              <a:t>&lt;h1&gt;School Trips&lt;/h1&gt;</a:t>
+            </a:r>
+          </a:p>
+          <a:p>
+            <a:pPr lvl="1"/>
+            <a:r>
+              <a:rPr sz="1600" b="0">
+                <a:solidFill>
+                  <a:srgbClr val="1A365D"/>
+                </a:solidFill>
+                <a:latin typeface="Consolas"/>
+              </a:rPr>
+              <a:t>&lt;div id="gallery"&gt;</a:t>
+            </a:r>
+          </a:p>
+          <a:p>
+            <a:pPr lvl="1"/>
+            <a:r>
+              <a:rPr sz="1600" b="0">
+                <a:solidFill>
+                  <a:srgbClr val="1A365D"/>
+                </a:solidFill>
+                <a:latin typeface="Consolas"/>
+              </a:rPr>
+              <a:t>  &lt;p&gt;See our &lt;a href="photos.html"&gt;photo gallery&lt;/a&gt;.&lt;/p&gt;</a:t>
+            </a:r>
+          </a:p>
+          <a:p>
+            <a:pPr lvl="1"/>
+            <a:r>
+              <a:rPr sz="1600" b="0">
+                <a:solidFill>
+                  <a:srgbClr val="1A365D"/>
+                </a:solidFill>
+                <a:latin typeface="Consolas"/>
+              </a:rPr>
+              <a:t>  &lt;img src="paris.jpg" alt="Students in Paris"&gt;</a:t>
+            </a:r>
+          </a:p>
+          <a:p>
+            <a:pPr lvl="1"/>
+            <a:r>
+              <a:rPr sz="1600" b="0">
+                <a:solidFill>
+                  <a:srgbClr val="1A365D"/>
+                </a:solidFill>
+                <a:latin typeface="Consolas"/>
+              </a:rPr>
+              <a:t>&lt;/div&gt;</a:t>
             </a:r>
           </a:p>
         </p:txBody>
@@ -4911,7 +7903,7 @@
                 </a:solidFill>
                 <a:latin typeface="Calibri"/>
               </a:rPr>
-              <a:t>Client-side vs server-side processing</a:t>
+              <a:t>Lists, forms, script and link</a:t>
             </a:r>
           </a:p>
         </p:txBody>
@@ -4940,49 +7932,157 @@
           <a:p>
             <a:pPr/>
             <a:r>
-              <a:rPr sz="2200" b="0">
-                <a:solidFill>
-                  <a:srgbClr val="222222"/>
-                </a:solidFill>
-                <a:latin typeface="Calibri"/>
-              </a:rPr>
-              <a:t>Client-side runs in the user's browser: fast and immediate, reduces server load, but is insecure as it can be viewed and bypassed.</a:t>
+              <a:rPr sz="2000" b="0">
+                <a:solidFill>
+                  <a:srgbClr val="222222"/>
+                </a:solidFill>
+                <a:latin typeface="Calibri"/>
+              </a:rPr>
+              <a:t>ol creates a numbered list and ul a bulleted list; every item inside is an li.</a:t>
             </a:r>
           </a:p>
           <a:p>
             <a:pPr/>
             <a:r>
-              <a:rPr sz="2200" b="0">
-                <a:solidFill>
-                  <a:srgbClr val="222222"/>
-                </a:solidFill>
-                <a:latin typeface="Calibri"/>
-              </a:rPr>
-              <a:t>Server-side runs on the web server: secure and hidden, but slower (a round trip) and increases server load.</a:t>
+              <a:rPr sz="2000" b="0">
+                <a:solidFill>
+                  <a:srgbClr val="222222"/>
+                </a:solidFill>
+                <a:latin typeface="Calibri"/>
+              </a:rPr>
+              <a:t>form collects user input; input creates a control, and its type attribute sets the kind (text, submit).</a:t>
             </a:r>
           </a:p>
           <a:p>
             <a:pPr/>
             <a:r>
-              <a:rPr sz="2200" b="0">
-                <a:solidFill>
-                  <a:srgbClr val="222222"/>
-                </a:solidFill>
-                <a:latin typeface="Calibri"/>
-              </a:rPr>
-              <a:t>Client-side example: JavaScript form validation for instant feedback; server-side example: database queries, login or payment checks.</a:t>
-            </a:r>
-          </a:p>
-          <a:p>
-            <a:pPr/>
-            <a:r>
-              <a:rPr sz="2200" b="0">
-                <a:solidFill>
-                  <a:srgbClr val="222222"/>
-                </a:solidFill>
-                <a:latin typeface="Calibri"/>
-              </a:rPr>
-              <a:t>Security-critical checks must run server-side even if a client-side check also exists, because the client cannot be trusted.</a:t>
+              <a:rPr sz="2000" b="0">
+                <a:solidFill>
+                  <a:srgbClr val="222222"/>
+                </a:solidFill>
+                <a:latin typeface="Calibri"/>
+              </a:rPr>
+              <a:t>script embeds JavaScript or loads it from a file; link in the head attaches an external stylesheet.</a:t>
+            </a:r>
+          </a:p>
+          <a:p>
+            <a:pPr lvl="1"/>
+            <a:r>
+              <a:rPr sz="1600" b="0">
+                <a:solidFill>
+                  <a:srgbClr val="1A365D"/>
+                </a:solidFill>
+                <a:latin typeface="Consolas"/>
+              </a:rPr>
+              <a:t>&lt;ol&gt;</a:t>
+            </a:r>
+          </a:p>
+          <a:p>
+            <a:pPr lvl="1"/>
+            <a:r>
+              <a:rPr sz="1600" b="0">
+                <a:solidFill>
+                  <a:srgbClr val="1A365D"/>
+                </a:solidFill>
+                <a:latin typeface="Consolas"/>
+              </a:rPr>
+              <a:t>  &lt;li&gt;Plan&lt;/li&gt;</a:t>
+            </a:r>
+          </a:p>
+          <a:p>
+            <a:pPr lvl="1"/>
+            <a:r>
+              <a:rPr sz="1600" b="0">
+                <a:solidFill>
+                  <a:srgbClr val="1A365D"/>
+                </a:solidFill>
+                <a:latin typeface="Consolas"/>
+              </a:rPr>
+              <a:t>  &lt;li&gt;Code&lt;/li&gt;</a:t>
+            </a:r>
+          </a:p>
+          <a:p>
+            <a:pPr lvl="1"/>
+            <a:r>
+              <a:rPr sz="1600" b="0">
+                <a:solidFill>
+                  <a:srgbClr val="1A365D"/>
+                </a:solidFill>
+                <a:latin typeface="Consolas"/>
+              </a:rPr>
+              <a:t>  &lt;li&gt;Test&lt;/li&gt;</a:t>
+            </a:r>
+          </a:p>
+          <a:p>
+            <a:pPr lvl="1"/>
+            <a:r>
+              <a:rPr sz="1600" b="0">
+                <a:solidFill>
+                  <a:srgbClr val="1A365D"/>
+                </a:solidFill>
+                <a:latin typeface="Consolas"/>
+              </a:rPr>
+              <a:t>&lt;/ol&gt;</a:t>
+            </a:r>
+          </a:p>
+          <a:p>
+            <a:pPr lvl="1"/>
+            <a:r>
+              <a:rPr sz="1600" b="0">
+                <a:solidFill>
+                  <a:srgbClr val="1A365D"/>
+                </a:solidFill>
+                <a:latin typeface="Consolas"/>
+              </a:rPr>
+              <a:t>&lt;form&gt;</a:t>
+            </a:r>
+          </a:p>
+          <a:p>
+            <a:pPr lvl="1"/>
+            <a:r>
+              <a:rPr sz="1600" b="0">
+                <a:solidFill>
+                  <a:srgbClr val="1A365D"/>
+                </a:solidFill>
+                <a:latin typeface="Consolas"/>
+              </a:rPr>
+              <a:t>  &lt;input type="text" id="name"&gt;</a:t>
+            </a:r>
+          </a:p>
+          <a:p>
+            <a:pPr lvl="1"/>
+            <a:r>
+              <a:rPr sz="1600" b="0">
+                <a:solidFill>
+                  <a:srgbClr val="1A365D"/>
+                </a:solidFill>
+                <a:latin typeface="Consolas"/>
+              </a:rPr>
+              <a:t>  &lt;input type="submit" value="Send"&gt;</a:t>
+            </a:r>
+          </a:p>
+          <a:p>
+            <a:pPr lvl="1"/>
+            <a:r>
+              <a:rPr sz="1600" b="0">
+                <a:solidFill>
+                  <a:srgbClr val="1A365D"/>
+                </a:solidFill>
+                <a:latin typeface="Consolas"/>
+              </a:rPr>
+              <a:t>&lt;/form&gt;</a:t>
+            </a:r>
+          </a:p>
+          <a:p>
+            <a:pPr lvl="1"/>
+            <a:r>
+              <a:rPr sz="1600" b="0">
+                <a:solidFill>
+                  <a:srgbClr val="1A365D"/>
+                </a:solidFill>
+                <a:latin typeface="Consolas"/>
+              </a:rPr>
+              <a:t>&lt;script src="check.js"&gt;&lt;/script&gt;</a:t>
             </a:r>
           </a:p>
         </p:txBody>
